--- a/Motor_Scoring_RabbitMQ_Kafka.pptx
+++ b/Motor_Scoring_RabbitMQ_Kafka.pptx
@@ -4,6 +4,9 @@
   <p:sldMasterIdLst>
     <p:sldMasterId id="2147483648" r:id="rId1"/>
   </p:sldMasterIdLst>
+  <p:notesMasterIdLst>
+    <p:notesMasterId r:id="rId17"/>
+  </p:notesMasterIdLst>
   <p:sldIdLst>
     <p:sldId id="256" r:id="rId2"/>
     <p:sldId id="257" r:id="rId3"/>
@@ -19,10 +22,8 @@
     <p:sldId id="267" r:id="rId13"/>
     <p:sldId id="268" r:id="rId14"/>
     <p:sldId id="269" r:id="rId15"/>
+    <p:sldId id="270" r:id="rId16"/>
   </p:sldIdLst>
-  <p:notesMasterIdLst>
-    <p:notesMasterId r:id="rId16"/>
-  </p:notesMasterIdLst>
   <p:sldSz cx="12192000" cy="6858000"/>
   <p:notesSz cx="6858000" cy="12192000"/>
   <p:defaultTextStyle>
@@ -117,6 +118,11 @@
       </a:defRPr>
     </a:lvl9pPr>
   </p:defaultTextStyle>
+  <p:extLst>
+    <p:ext uri="{EFAFB233-063F-42B5-8137-9DF3F51BA10A}">
+      <p15:sldGuideLst xmlns:p15="http://schemas.microsoft.com/office/powerpoint/2012/main"/>
+    </p:ext>
+  </p:extLst>
 </p:presentation>
 </file>
 
@@ -142,234 +148,10 @@
           <a:chExt cx="0" cy="0"/>
         </a:xfrm>
       </p:grpSpPr>
-      <p:sp>
-        <p:nvSpPr>
-          <p:cNvPr id="2" name="Header Placeholder 1"/>
-          <p:cNvSpPr>
-            <a:spLocks noGrp="1"/>
-          </p:cNvSpPr>
-          <p:nvPr>
-            <p:ph type="hdr" sz="quarter"/>
-          </p:nvPr>
-        </p:nvSpPr>
-        <p:spPr>
-          <a:xfrm>
-            <a:off x="0" y="0"/>
-            <a:ext cx="2971800" cy="458788"/>
-          </a:xfrm>
-          <a:prstGeom prst="rect">
-            <a:avLst/>
-          </a:prstGeom>
-        </p:spPr>
-        <p:txBody>
-          <a:bodyPr vert="horz" lIns="91440" tIns="45720" rIns="91440" bIns="45720" rtlCol="0"/>
-          <a:lstStyle>
-            <a:lvl1pPr algn="l">
-              <a:defRPr sz="1200"/>
-            </a:lvl1pPr>
-          </a:lstStyle>
-          <a:p>
-            <a:endParaRPr lang="en-US"/>
-          </a:p>
-        </p:txBody>
-      </p:sp>
-      <p:sp>
-        <p:nvSpPr>
-          <p:cNvPr id="3" name="Date Placeholder 2"/>
-          <p:cNvSpPr>
-            <a:spLocks noGrp="1"/>
-          </p:cNvSpPr>
-          <p:nvPr>
-            <p:ph type="dt" idx="1"/>
-          </p:nvPr>
-        </p:nvSpPr>
-        <p:spPr>
-          <a:xfrm>
-            <a:off x="3884613" y="0"/>
-            <a:ext cx="2971800" cy="458788"/>
-          </a:xfrm>
-          <a:prstGeom prst="rect">
-            <a:avLst/>
-          </a:prstGeom>
-        </p:spPr>
-        <p:txBody>
-          <a:bodyPr vert="horz" lIns="91440" tIns="45720" rIns="91440" bIns="45720" rtlCol="0"/>
-          <a:lstStyle>
-            <a:lvl1pPr algn="r">
-              <a:defRPr sz="1200"/>
-            </a:lvl1pPr>
-          </a:lstStyle>
-          <a:p>
-            <a:fld id="{5282F153-3F37-0F45-9E97-73ACFA13230C}" type="datetimeFigureOut">
-              <a:rPr lang="en-US"/>
-              <a:t>7/23/19</a:t>
-            </a:fld>
-            <a:endParaRPr lang="en-US"/>
-          </a:p>
-        </p:txBody>
-      </p:sp>
-      <p:sp>
-        <p:nvSpPr>
-          <p:cNvPr id="4" name="Slide Image Placeholder 3"/>
-          <p:cNvSpPr>
-            <a:spLocks noGrp="1" noRot="1" noChangeAspect="1"/>
-          </p:cNvSpPr>
-          <p:nvPr>
-            <p:ph type="sldImg" idx="2"/>
-          </p:nvPr>
-        </p:nvSpPr>
-        <p:spPr>
-          <a:xfrm>
-            <a:off x="685800" y="1143000"/>
-            <a:ext cx="5486400" cy="3086100"/>
-          </a:xfrm>
-          <a:prstGeom prst="rect">
-            <a:avLst/>
-          </a:prstGeom>
-          <a:noFill/>
-          <a:ln w="12700">
-            <a:solidFill>
-              <a:prstClr val="black"/>
-            </a:solidFill>
-          </a:ln>
-        </p:spPr>
-        <p:txBody>
-          <a:bodyPr vert="horz" lIns="91440" tIns="45720" rIns="91440" bIns="45720" rtlCol="0" anchor="ctr"/>
-          <a:lstStyle/>
-          <a:p>
-            <a:endParaRPr lang="en-US"/>
-          </a:p>
-        </p:txBody>
-      </p:sp>
-      <p:sp>
-        <p:nvSpPr>
-          <p:cNvPr id="5" name="Notes Placeholder 4"/>
-          <p:cNvSpPr>
-            <a:spLocks noGrp="1"/>
-          </p:cNvSpPr>
-          <p:nvPr>
-            <p:ph type="body" sz="quarter" idx="3"/>
-          </p:nvPr>
-        </p:nvSpPr>
-        <p:spPr>
-          <a:xfrm>
-            <a:off x="685800" y="4400550"/>
-            <a:ext cx="5486400" cy="3600450"/>
-          </a:xfrm>
-          <a:prstGeom prst="rect">
-            <a:avLst/>
-          </a:prstGeom>
-        </p:spPr>
-        <p:txBody>
-          <a:bodyPr vert="horz" lIns="91440" tIns="45720" rIns="91440" bIns="45720" rtlCol="0"/>
-          <a:lstStyle/>
-          <a:p>
-            <a:pPr lvl="0"/>
-            <a:r>
-              <a:rPr lang="en-US"/>
-              <a:t>Click to edit Master text styles</a:t>
-            </a:r>
-          </a:p>
-          <a:p>
-            <a:pPr lvl="1"/>
-            <a:r>
-              <a:rPr lang="en-US"/>
-              <a:t>Second level</a:t>
-            </a:r>
-          </a:p>
-          <a:p>
-            <a:pPr lvl="2"/>
-            <a:r>
-              <a:rPr lang="en-US"/>
-              <a:t>Third level</a:t>
-            </a:r>
-          </a:p>
-          <a:p>
-            <a:pPr lvl="3"/>
-            <a:r>
-              <a:rPr lang="en-US"/>
-              <a:t>Fourth level</a:t>
-            </a:r>
-          </a:p>
-          <a:p>
-            <a:pPr lvl="4"/>
-            <a:r>
-              <a:rPr lang="en-US"/>
-              <a:t>Fifth level</a:t>
-            </a:r>
-          </a:p>
-        </p:txBody>
-      </p:sp>
-      <p:sp>
-        <p:nvSpPr>
-          <p:cNvPr id="6" name="Footer Placeholder 5"/>
-          <p:cNvSpPr>
-            <a:spLocks noGrp="1"/>
-          </p:cNvSpPr>
-          <p:nvPr>
-            <p:ph type="ftr" sz="quarter" idx="4"/>
-          </p:nvPr>
-        </p:nvSpPr>
-        <p:spPr>
-          <a:xfrm>
-            <a:off x="0" y="8685213"/>
-            <a:ext cx="2971800" cy="458787"/>
-          </a:xfrm>
-          <a:prstGeom prst="rect">
-            <a:avLst/>
-          </a:prstGeom>
-        </p:spPr>
-        <p:txBody>
-          <a:bodyPr vert="horz" lIns="91440" tIns="45720" rIns="91440" bIns="45720" rtlCol="0" anchor="b"/>
-          <a:lstStyle>
-            <a:lvl1pPr algn="l">
-              <a:defRPr sz="1200"/>
-            </a:lvl1pPr>
-          </a:lstStyle>
-          <a:p>
-            <a:endParaRPr lang="en-US"/>
-          </a:p>
-        </p:txBody>
-      </p:sp>
-      <p:sp>
-        <p:nvSpPr>
-          <p:cNvPr id="7" name="Slide Number Placeholder 6"/>
-          <p:cNvSpPr>
-            <a:spLocks noGrp="1"/>
-          </p:cNvSpPr>
-          <p:nvPr>
-            <p:ph type="sldNum" sz="quarter" idx="5"/>
-          </p:nvPr>
-        </p:nvSpPr>
-        <p:spPr>
-          <a:xfrm>
-            <a:off x="3884613" y="8685213"/>
-            <a:ext cx="2971800" cy="458787"/>
-          </a:xfrm>
-          <a:prstGeom prst="rect">
-            <a:avLst/>
-          </a:prstGeom>
-        </p:spPr>
-        <p:txBody>
-          <a:bodyPr vert="horz" lIns="91440" tIns="45720" rIns="91440" bIns="45720" rtlCol="0" anchor="b"/>
-          <a:lstStyle>
-            <a:lvl1pPr algn="r">
-              <a:defRPr sz="1200"/>
-            </a:lvl1pPr>
-          </a:lstStyle>
-          <a:p>
-            <a:fld id="{CE5E9CC1-C706-0F49-92D6-E571CC5EEA8F}" type="slidenum">
-              <a:rPr lang="en-US"/>
-              <a:t>‹#›</a:t>
-            </a:fld>
-            <a:endParaRPr lang="en-US"/>
-          </a:p>
-        </p:txBody>
-      </p:sp>
     </p:spTree>
     <p:extLst>
       <p:ext uri="{BB962C8B-B14F-4D97-AF65-F5344CB8AC3E}">
-        <p14:creationId xmlns:p14="http://schemas.microsoft.com/office/powerpoint/2010/main" val="1024086991"/>
+        <p14:creationId xmlns:p14="http://schemas.microsoft.com/office/powerpoint/2010/main" val="446156937"/>
       </p:ext>
     </p:extLst>
   </p:cSld>
@@ -513,10 +295,6 @@
           <a:bodyPr/>
           <a:lstStyle/>
           <a:p>
-            <a:r>
-              <a:rPr lang="en-US" dirty="0"/>
-              <a:t/>
-            </a:r>
             <a:endParaRPr lang="en-US" dirty="0"/>
           </a:p>
         </p:txBody>
@@ -601,10 +379,6 @@
           <a:bodyPr/>
           <a:lstStyle/>
           <a:p>
-            <a:r>
-              <a:rPr lang="en-US" dirty="0"/>
-              <a:t/>
-            </a:r>
             <a:endParaRPr lang="en-US" dirty="0"/>
           </a:p>
         </p:txBody>
@@ -689,10 +463,6 @@
           <a:bodyPr/>
           <a:lstStyle/>
           <a:p>
-            <a:r>
-              <a:rPr lang="en-US" dirty="0"/>
-              <a:t/>
-            </a:r>
             <a:endParaRPr lang="en-US" dirty="0"/>
           </a:p>
         </p:txBody>
@@ -777,10 +547,6 @@
           <a:bodyPr/>
           <a:lstStyle/>
           <a:p>
-            <a:r>
-              <a:rPr lang="en-US" dirty="0"/>
-              <a:t/>
-            </a:r>
             <a:endParaRPr lang="en-US" dirty="0"/>
           </a:p>
         </p:txBody>
@@ -865,10 +631,6 @@
           <a:bodyPr/>
           <a:lstStyle/>
           <a:p>
-            <a:r>
-              <a:rPr lang="en-US" dirty="0"/>
-              <a:t/>
-            </a:r>
             <a:endParaRPr lang="en-US" dirty="0"/>
           </a:p>
         </p:txBody>
@@ -953,10 +715,6 @@
           <a:bodyPr/>
           <a:lstStyle/>
           <a:p>
-            <a:r>
-              <a:rPr lang="en-US" dirty="0"/>
-              <a:t/>
-            </a:r>
             <a:endParaRPr lang="en-US" dirty="0"/>
           </a:p>
         </p:txBody>
@@ -979,6 +737,90 @@
             <a:fld id="{F7021451-1387-4CA6-816F-3879F97B5CBC}" type="slidenum">
               <a:rPr lang="en-US"/>
               <a:t>14</a:t>
+            </a:fld>
+            <a:endParaRPr lang="en-US"/>
+          </a:p>
+        </p:txBody>
+      </p:sp>
+    </p:spTree>
+    <p:extLst>
+      <p:ext uri="{BB962C8B-B14F-4D97-AF65-F5344CB8AC3E}">
+        <p14:creationId xmlns:p14="http://schemas.microsoft.com/office/powerpoint/2010/main" val="1024086991"/>
+      </p:ext>
+    </p:extLst>
+  </p:cSld>
+  <p:clrMapOvr>
+    <a:masterClrMapping/>
+  </p:clrMapOvr>
+</p:notes>
+</file>
+
+<file path=ppt/notesSlides/notesSlide15.xml><?xml version="1.0" encoding="utf-8"?>
+<p:notes xmlns:a="http://schemas.openxmlformats.org/drawingml/2006/main" xmlns:r="http://schemas.openxmlformats.org/officeDocument/2006/relationships" xmlns:p="http://schemas.openxmlformats.org/presentationml/2006/main">
+  <p:cSld>
+    <p:spTree>
+      <p:nvGrpSpPr>
+        <p:cNvPr id="1" name=""/>
+        <p:cNvGrpSpPr/>
+        <p:nvPr/>
+      </p:nvGrpSpPr>
+      <p:grpSpPr>
+        <a:xfrm>
+          <a:off x="0" y="0"/>
+          <a:ext cx="0" cy="0"/>
+          <a:chOff x="0" y="0"/>
+          <a:chExt cx="0" cy="0"/>
+        </a:xfrm>
+      </p:grpSpPr>
+      <p:sp>
+        <p:nvSpPr>
+          <p:cNvPr id="2" name="Slide Image Placeholder 1"/>
+          <p:cNvSpPr>
+            <a:spLocks noGrp="1" noRot="1" noChangeAspect="1"/>
+          </p:cNvSpPr>
+          <p:nvPr>
+            <p:ph type="sldImg"/>
+          </p:nvPr>
+        </p:nvSpPr>
+        <p:spPr/>
+      </p:sp>
+      <p:sp>
+        <p:nvSpPr>
+          <p:cNvPr id="3" name="Notes Placeholder 2"/>
+          <p:cNvSpPr>
+            <a:spLocks noGrp="1"/>
+          </p:cNvSpPr>
+          <p:nvPr>
+            <p:ph type="body" idx="1"/>
+          </p:nvPr>
+        </p:nvSpPr>
+        <p:spPr/>
+        <p:txBody>
+          <a:bodyPr/>
+          <a:lstStyle/>
+          <a:p>
+            <a:endParaRPr lang="en-US" dirty="0"/>
+          </a:p>
+        </p:txBody>
+      </p:sp>
+      <p:sp>
+        <p:nvSpPr>
+          <p:cNvPr id="4" name="Slide Number Placeholder 3"/>
+          <p:cNvSpPr>
+            <a:spLocks noGrp="1"/>
+          </p:cNvSpPr>
+          <p:nvPr>
+            <p:ph type="sldNum" sz="quarter" idx="10"/>
+          </p:nvPr>
+        </p:nvSpPr>
+        <p:spPr/>
+        <p:txBody>
+          <a:bodyPr/>
+          <a:lstStyle/>
+          <a:p>
+            <a:fld id="{F7021451-1387-4CA6-816F-3879F97B5CBC}" type="slidenum">
+              <a:rPr lang="en-US"/>
+              <a:t>15</a:t>
             </a:fld>
             <a:endParaRPr lang="en-US"/>
           </a:p>
@@ -1041,10 +883,6 @@
           <a:bodyPr/>
           <a:lstStyle/>
           <a:p>
-            <a:r>
-              <a:rPr lang="en-US" dirty="0"/>
-              <a:t/>
-            </a:r>
             <a:endParaRPr lang="en-US" dirty="0"/>
           </a:p>
         </p:txBody>
@@ -1129,10 +967,6 @@
           <a:bodyPr/>
           <a:lstStyle/>
           <a:p>
-            <a:r>
-              <a:rPr lang="en-US" dirty="0"/>
-              <a:t/>
-            </a:r>
             <a:endParaRPr lang="en-US" dirty="0"/>
           </a:p>
         </p:txBody>
@@ -1217,10 +1051,6 @@
           <a:bodyPr/>
           <a:lstStyle/>
           <a:p>
-            <a:r>
-              <a:rPr lang="en-US" dirty="0"/>
-              <a:t/>
-            </a:r>
             <a:endParaRPr lang="en-US" dirty="0"/>
           </a:p>
         </p:txBody>
@@ -1305,10 +1135,6 @@
           <a:bodyPr/>
           <a:lstStyle/>
           <a:p>
-            <a:r>
-              <a:rPr lang="en-US" dirty="0"/>
-              <a:t/>
-            </a:r>
             <a:endParaRPr lang="en-US" dirty="0"/>
           </a:p>
         </p:txBody>
@@ -1393,10 +1219,6 @@
           <a:bodyPr/>
           <a:lstStyle/>
           <a:p>
-            <a:r>
-              <a:rPr lang="en-US" dirty="0"/>
-              <a:t/>
-            </a:r>
             <a:endParaRPr lang="en-US" dirty="0"/>
           </a:p>
         </p:txBody>
@@ -1481,10 +1303,6 @@
           <a:bodyPr/>
           <a:lstStyle/>
           <a:p>
-            <a:r>
-              <a:rPr lang="en-US" dirty="0"/>
-              <a:t/>
-            </a:r>
             <a:endParaRPr lang="en-US" dirty="0"/>
           </a:p>
         </p:txBody>
@@ -1569,10 +1387,6 @@
           <a:bodyPr/>
           <a:lstStyle/>
           <a:p>
-            <a:r>
-              <a:rPr lang="en-US" dirty="0"/>
-              <a:t/>
-            </a:r>
             <a:endParaRPr lang="en-US" dirty="0"/>
           </a:p>
         </p:txBody>
@@ -1657,10 +1471,6 @@
           <a:bodyPr/>
           <a:lstStyle/>
           <a:p>
-            <a:r>
-              <a:rPr lang="en-US" dirty="0"/>
-              <a:t/>
-            </a:r>
             <a:endParaRPr lang="en-US" dirty="0"/>
           </a:p>
         </p:txBody>
@@ -1734,6 +1544,11 @@
 <file path=ppt/slideMasters/slideMaster1.xml><?xml version="1.0" encoding="utf-8"?>
 <p:sldMaster xmlns:a="http://schemas.openxmlformats.org/drawingml/2006/main" xmlns:r="http://schemas.openxmlformats.org/officeDocument/2006/relationships" xmlns:p="http://schemas.openxmlformats.org/presentationml/2006/main">
   <p:cSld>
+    <p:bg>
+      <p:bgRef idx="1001">
+        <a:schemeClr val="bg1"/>
+      </p:bgRef>
+    </p:bg>
     <p:spTree>
       <p:nvGrpSpPr>
         <p:cNvPr id="1" name=""/>
@@ -2016,6 +1831,7 @@
         <a:solidFill>
           <a:srgbClr val="121D33"/>
         </a:solidFill>
+        <a:effectLst/>
       </p:bgPr>
     </p:bg>
     <p:spTree>
@@ -2051,6 +1867,13 @@
           </a:solidFill>
           <a:ln/>
         </p:spPr>
+        <p:txBody>
+          <a:bodyPr/>
+          <a:lstStyle/>
+          <a:p>
+            <a:endParaRPr lang="es-PE"/>
+          </a:p>
+        </p:txBody>
       </p:sp>
       <p:sp>
         <p:nvSpPr>
@@ -2076,6 +1899,13 @@
             <a:prstDash val="solid"/>
           </a:ln>
         </p:spPr>
+        <p:txBody>
+          <a:bodyPr/>
+          <a:lstStyle/>
+          <a:p>
+            <a:endParaRPr lang="es-PE"/>
+          </a:p>
+        </p:txBody>
       </p:sp>
       <p:sp>
         <p:nvSpPr>
@@ -2096,6 +1926,13 @@
           </a:solidFill>
           <a:ln/>
         </p:spPr>
+        <p:txBody>
+          <a:bodyPr/>
+          <a:lstStyle/>
+          <a:p>
+            <a:endParaRPr lang="es-PE"/>
+          </a:p>
+        </p:txBody>
       </p:sp>
       <p:sp>
         <p:nvSpPr>
@@ -2116,6 +1953,13 @@
           </a:solidFill>
           <a:ln/>
         </p:spPr>
+        <p:txBody>
+          <a:bodyPr/>
+          <a:lstStyle/>
+          <a:p>
+            <a:endParaRPr lang="es-PE"/>
+          </a:p>
+        </p:txBody>
       </p:sp>
       <p:sp>
         <p:nvSpPr>
@@ -2138,11 +1982,11 @@
           <a:bodyPr wrap="square" rtlCol="0" anchor="ctr"/>
           <a:lstStyle/>
           <a:p>
-            <a:pPr indent="0" marL="0">
-              <a:buNone/>
-            </a:pPr>
-            <a:r>
-              <a:rPr lang="en-US" sz="1400" b="1" spc="300" kern="0" dirty="0">
+            <a:pPr marL="0" indent="0">
+              <a:buNone/>
+            </a:pPr>
+            <a:r>
+              <a:rPr lang="en-US" sz="1400" b="1" kern="0" spc="300" dirty="0">
                 <a:solidFill>
                   <a:srgbClr val="1C8C99"/>
                 </a:solidFill>
@@ -2177,7 +2021,7 @@
           <a:bodyPr wrap="square" rtlCol="0" anchor="ctr"/>
           <a:lstStyle/>
           <a:p>
-            <a:pPr indent="0" marL="0">
+            <a:pPr marL="0" indent="0">
               <a:buNone/>
             </a:pPr>
             <a:r>
@@ -2216,7 +2060,7 @@
           <a:bodyPr wrap="square" rtlCol="0" anchor="ctr"/>
           <a:lstStyle/>
           <a:p>
-            <a:pPr indent="0" marL="0">
+            <a:pPr marL="0" indent="0">
               <a:buNone/>
             </a:pPr>
             <a:r>
@@ -2256,6 +2100,13 @@
             <a:prstDash val="solid"/>
           </a:ln>
         </p:spPr>
+        <p:txBody>
+          <a:bodyPr/>
+          <a:lstStyle/>
+          <a:p>
+            <a:endParaRPr lang="es-PE"/>
+          </a:p>
+        </p:txBody>
       </p:sp>
       <p:sp>
         <p:nvSpPr>
@@ -2278,7 +2129,7 @@
           <a:bodyPr wrap="square" rtlCol="0" anchor="ctr"/>
           <a:lstStyle/>
           <a:p>
-            <a:pPr indent="0" marL="0">
+            <a:pPr marL="0" indent="0">
               <a:buNone/>
             </a:pPr>
             <a:r>
@@ -2317,7 +2168,7 @@
           <a:bodyPr wrap="square" rtlCol="0" anchor="ctr"/>
           <a:lstStyle/>
           <a:p>
-            <a:pPr indent="0" marL="0">
+            <a:pPr marL="0" indent="0">
               <a:buNone/>
             </a:pPr>
             <a:r>
@@ -2332,6 +2183,67 @@
               <a:t>José  ·  Curso de Arquitectura de Software</a:t>
             </a:r>
             <a:endParaRPr lang="en-US" sz="1100" dirty="0"/>
+          </a:p>
+        </p:txBody>
+      </p:sp>
+      <p:sp>
+        <p:nvSpPr>
+          <p:cNvPr id="13" name="Text 8">
+            <a:extLst>
+              <a:ext uri="{FF2B5EF4-FFF2-40B4-BE49-F238E27FC236}">
+                <a16:creationId xmlns:a16="http://schemas.microsoft.com/office/drawing/2014/main" id="{0B41EF70-6114-1004-F220-488F0BEC9BB1}"/>
+              </a:ext>
+            </a:extLst>
+          </p:cNvPr>
+          <p:cNvSpPr/>
+          <p:nvPr/>
+        </p:nvSpPr>
+        <p:spPr>
+          <a:xfrm>
+            <a:off x="658368" y="4782047"/>
+            <a:ext cx="8046720" cy="365760"/>
+          </a:xfrm>
+          <a:prstGeom prst="rect">
+            <a:avLst/>
+          </a:prstGeom>
+          <a:noFill/>
+          <a:ln/>
+        </p:spPr>
+        <p:txBody>
+          <a:bodyPr wrap="square" rtlCol="0" anchor="ctr"/>
+          <a:lstStyle/>
+          <a:p>
+            <a:pPr marL="0" indent="0">
+              <a:buNone/>
+            </a:pPr>
+            <a:r>
+              <a:rPr lang="en-US" sz="1300" i="1" dirty="0">
+                <a:solidFill>
+                  <a:srgbClr val="9FB0C4"/>
+                </a:solidFill>
+                <a:latin typeface="Calibri" pitchFamily="34" charset="0"/>
+                <a:ea typeface="Calibri" pitchFamily="34" charset="-122"/>
+                <a:cs typeface="Calibri" pitchFamily="34" charset="-120"/>
+              </a:rPr>
+              <a:t>Integrantes:</a:t>
+            </a:r>
+          </a:p>
+          <a:p>
+            <a:pPr marL="0" indent="0">
+              <a:buNone/>
+            </a:pPr>
+            <a:r>
+              <a:rPr lang="en-US" sz="1300" i="1" dirty="0">
+                <a:solidFill>
+                  <a:srgbClr val="9FB0C4"/>
+                </a:solidFill>
+                <a:latin typeface="Calibri" pitchFamily="34" charset="0"/>
+                <a:ea typeface="Calibri" pitchFamily="34" charset="-122"/>
+                <a:cs typeface="Calibri" pitchFamily="34" charset="-120"/>
+              </a:rPr>
+              <a:t>  ·  José Julca Díaz</a:t>
+            </a:r>
+            <a:endParaRPr lang="en-US" sz="1300" dirty="0"/>
           </a:p>
         </p:txBody>
       </p:sp>
@@ -2351,6 +2263,7 @@
         <a:solidFill>
           <a:srgbClr val="121D33"/>
         </a:solidFill>
+        <a:effectLst/>
       </p:bgPr>
     </p:bg>
     <p:spTree>
@@ -2388,11 +2301,11 @@
           <a:bodyPr wrap="square" rtlCol="0" anchor="ctr"/>
           <a:lstStyle/>
           <a:p>
-            <a:pPr indent="0" marL="0">
-              <a:buNone/>
-            </a:pPr>
-            <a:r>
-              <a:rPr lang="en-US" sz="1200" b="1" spc="200" kern="0" dirty="0">
+            <a:pPr marL="0" indent="0">
+              <a:buNone/>
+            </a:pPr>
+            <a:r>
+              <a:rPr lang="en-US" sz="1200" b="1" kern="0" spc="200" dirty="0">
                 <a:solidFill>
                   <a:srgbClr val="1C8C99"/>
                 </a:solidFill>
@@ -2427,7 +2340,7 @@
           <a:bodyPr wrap="square" rtlCol="0" anchor="ctr"/>
           <a:lstStyle/>
           <a:p>
-            <a:pPr indent="0" marL="0">
+            <a:pPr marL="0" indent="0">
               <a:buNone/>
             </a:pPr>
             <a:r>
@@ -2466,6 +2379,13 @@
           </a:solidFill>
           <a:ln/>
         </p:spPr>
+        <p:txBody>
+          <a:bodyPr/>
+          <a:lstStyle/>
+          <a:p>
+            <a:endParaRPr lang="es-PE"/>
+          </a:p>
+        </p:txBody>
       </p:sp>
       <p:sp>
         <p:nvSpPr>
@@ -2488,7 +2408,7 @@
           <a:bodyPr wrap="square" rtlCol="0" anchor="ctr"/>
           <a:lstStyle/>
           <a:p>
-            <a:pPr indent="0" marL="0">
+            <a:pPr marL="0" indent="0">
               <a:lnSpc>
                 <a:spcPct val="105000"/>
               </a:lnSpc>
@@ -2530,7 +2450,7 @@
           <a:bodyPr wrap="square" rtlCol="0" anchor="ctr"/>
           <a:lstStyle/>
           <a:p>
-            <a:pPr algn="ctr" indent="0" marL="0">
+            <a:pPr marL="0" indent="0" algn="ctr">
               <a:buNone/>
             </a:pPr>
             <a:r>
@@ -2569,6 +2489,13 @@
           </a:solidFill>
           <a:ln/>
         </p:spPr>
+        <p:txBody>
+          <a:bodyPr/>
+          <a:lstStyle/>
+          <a:p>
+            <a:endParaRPr lang="es-PE"/>
+          </a:p>
+        </p:txBody>
       </p:sp>
       <p:sp>
         <p:nvSpPr>
@@ -2591,7 +2518,7 @@
           <a:bodyPr wrap="square" rtlCol="0" anchor="ctr"/>
           <a:lstStyle/>
           <a:p>
-            <a:pPr indent="0" marL="0">
+            <a:pPr marL="0" indent="0">
               <a:lnSpc>
                 <a:spcPct val="105000"/>
               </a:lnSpc>
@@ -2633,7 +2560,7 @@
           <a:bodyPr wrap="square" rtlCol="0" anchor="ctr"/>
           <a:lstStyle/>
           <a:p>
-            <a:pPr algn="ctr" indent="0" marL="0">
+            <a:pPr marL="0" indent="0" algn="ctr">
               <a:buNone/>
             </a:pPr>
             <a:r>
@@ -2672,6 +2599,13 @@
           </a:solidFill>
           <a:ln/>
         </p:spPr>
+        <p:txBody>
+          <a:bodyPr/>
+          <a:lstStyle/>
+          <a:p>
+            <a:endParaRPr lang="es-PE"/>
+          </a:p>
+        </p:txBody>
       </p:sp>
       <p:sp>
         <p:nvSpPr>
@@ -2694,7 +2628,7 @@
           <a:bodyPr wrap="square" rtlCol="0" anchor="ctr"/>
           <a:lstStyle/>
           <a:p>
-            <a:pPr indent="0" marL="0">
+            <a:pPr marL="0" indent="0">
               <a:lnSpc>
                 <a:spcPct val="105000"/>
               </a:lnSpc>
@@ -2736,7 +2670,7 @@
           <a:bodyPr wrap="square" rtlCol="0" anchor="ctr"/>
           <a:lstStyle/>
           <a:p>
-            <a:pPr algn="ctr" indent="0" marL="0">
+            <a:pPr marL="0" indent="0" algn="ctr">
               <a:buNone/>
             </a:pPr>
             <a:r>
@@ -2775,6 +2709,13 @@
           </a:solidFill>
           <a:ln/>
         </p:spPr>
+        <p:txBody>
+          <a:bodyPr/>
+          <a:lstStyle/>
+          <a:p>
+            <a:endParaRPr lang="es-PE"/>
+          </a:p>
+        </p:txBody>
       </p:sp>
       <p:sp>
         <p:nvSpPr>
@@ -2797,7 +2738,7 @@
           <a:bodyPr wrap="square" rtlCol="0" anchor="ctr"/>
           <a:lstStyle/>
           <a:p>
-            <a:pPr indent="0" marL="0">
+            <a:pPr marL="0" indent="0">
               <a:lnSpc>
                 <a:spcPct val="105000"/>
               </a:lnSpc>
@@ -2839,6 +2780,13 @@
           </a:solidFill>
           <a:ln/>
         </p:spPr>
+        <p:txBody>
+          <a:bodyPr/>
+          <a:lstStyle/>
+          <a:p>
+            <a:endParaRPr lang="es-PE"/>
+          </a:p>
+        </p:txBody>
       </p:sp>
       <p:sp>
         <p:nvSpPr>
@@ -2861,7 +2809,7 @@
           <a:bodyPr wrap="square" rtlCol="0" anchor="ctr"/>
           <a:lstStyle/>
           <a:p>
-            <a:pPr indent="0" marL="0">
+            <a:pPr marL="0" indent="0">
               <a:buNone/>
             </a:pPr>
             <a:r>
@@ -2901,6 +2849,13 @@
             <a:prstDash val="dash"/>
           </a:ln>
         </p:spPr>
+        <p:txBody>
+          <a:bodyPr/>
+          <a:lstStyle/>
+          <a:p>
+            <a:endParaRPr lang="es-PE"/>
+          </a:p>
+        </p:txBody>
       </p:sp>
       <p:sp>
         <p:nvSpPr>
@@ -2928,6 +2883,13 @@
             <a:prstDash val="solid"/>
           </a:ln>
         </p:spPr>
+        <p:txBody>
+          <a:bodyPr/>
+          <a:lstStyle/>
+          <a:p>
+            <a:endParaRPr lang="es-PE"/>
+          </a:p>
+        </p:txBody>
       </p:sp>
       <p:sp>
         <p:nvSpPr>
@@ -2948,6 +2910,13 @@
           </a:solidFill>
           <a:ln/>
         </p:spPr>
+        <p:txBody>
+          <a:bodyPr/>
+          <a:lstStyle/>
+          <a:p>
+            <a:endParaRPr lang="es-PE"/>
+          </a:p>
+        </p:txBody>
       </p:sp>
       <p:sp>
         <p:nvSpPr>
@@ -2970,7 +2939,7 @@
           <a:bodyPr wrap="square" rtlCol="0" anchor="ctr"/>
           <a:lstStyle/>
           <a:p>
-            <a:pPr algn="ctr" indent="0" marL="0">
+            <a:pPr marL="0" indent="0" algn="ctr">
               <a:buNone/>
             </a:pPr>
             <a:r>
@@ -3009,7 +2978,7 @@
           <a:bodyPr wrap="square" rtlCol="0" anchor="ctr"/>
           <a:lstStyle/>
           <a:p>
-            <a:pPr indent="0" marL="0">
+            <a:pPr marL="0" indent="0">
               <a:buNone/>
             </a:pPr>
             <a:r>
@@ -3048,7 +3017,7 @@
           <a:bodyPr wrap="square" rtlCol="0" anchor="ctr"/>
           <a:lstStyle/>
           <a:p>
-            <a:pPr indent="0" marL="0">
+            <a:pPr marL="0" indent="0">
               <a:lnSpc>
                 <a:spcPct val="120000"/>
               </a:lnSpc>
@@ -3068,7 +3037,7 @@
             <a:endParaRPr lang="en-US" sz="950" dirty="0"/>
           </a:p>
           <a:p>
-            <a:pPr indent="0" marL="0">
+            <a:pPr marL="0" indent="0">
               <a:lnSpc>
                 <a:spcPct val="120000"/>
               </a:lnSpc>
@@ -3088,7 +3057,7 @@
             <a:endParaRPr lang="en-US" sz="950" dirty="0"/>
           </a:p>
           <a:p>
-            <a:pPr indent="0" marL="0">
+            <a:pPr marL="0" indent="0">
               <a:lnSpc>
                 <a:spcPct val="120000"/>
               </a:lnSpc>
@@ -3135,6 +3104,13 @@
             <a:prstDash val="solid"/>
           </a:ln>
         </p:spPr>
+        <p:txBody>
+          <a:bodyPr/>
+          <a:lstStyle/>
+          <a:p>
+            <a:endParaRPr lang="es-PE"/>
+          </a:p>
+        </p:txBody>
       </p:sp>
       <p:sp>
         <p:nvSpPr>
@@ -3155,6 +3131,13 @@
           </a:solidFill>
           <a:ln/>
         </p:spPr>
+        <p:txBody>
+          <a:bodyPr/>
+          <a:lstStyle/>
+          <a:p>
+            <a:endParaRPr lang="es-PE"/>
+          </a:p>
+        </p:txBody>
       </p:sp>
       <p:sp>
         <p:nvSpPr>
@@ -3175,6 +3158,13 @@
           </a:solidFill>
           <a:ln/>
         </p:spPr>
+        <p:txBody>
+          <a:bodyPr/>
+          <a:lstStyle/>
+          <a:p>
+            <a:endParaRPr lang="es-PE"/>
+          </a:p>
+        </p:txBody>
       </p:sp>
       <p:sp>
         <p:nvSpPr>
@@ -3195,6 +3185,13 @@
           </a:solidFill>
           <a:ln/>
         </p:spPr>
+        <p:txBody>
+          <a:bodyPr/>
+          <a:lstStyle/>
+          <a:p>
+            <a:endParaRPr lang="es-PE"/>
+          </a:p>
+        </p:txBody>
       </p:sp>
       <p:sp>
         <p:nvSpPr>
@@ -3215,6 +3212,13 @@
           </a:solidFill>
           <a:ln/>
         </p:spPr>
+        <p:txBody>
+          <a:bodyPr/>
+          <a:lstStyle/>
+          <a:p>
+            <a:endParaRPr lang="es-PE"/>
+          </a:p>
+        </p:txBody>
       </p:sp>
       <p:sp>
         <p:nvSpPr>
@@ -3237,7 +3241,7 @@
           <a:bodyPr wrap="square" rtlCol="0" anchor="ctr"/>
           <a:lstStyle/>
           <a:p>
-            <a:pPr indent="0" marL="0">
+            <a:pPr marL="0" indent="0">
               <a:buNone/>
             </a:pPr>
             <a:r>
@@ -3276,7 +3280,7 @@
           <a:bodyPr wrap="square" rtlCol="0" anchor="ctr"/>
           <a:lstStyle/>
           <a:p>
-            <a:pPr indent="0" marL="0">
+            <a:pPr marL="0" indent="0">
               <a:lnSpc>
                 <a:spcPct val="120000"/>
               </a:lnSpc>
@@ -3296,7 +3300,7 @@
             <a:endParaRPr lang="en-US" sz="950" dirty="0"/>
           </a:p>
           <a:p>
-            <a:pPr indent="0" marL="0">
+            <a:pPr marL="0" indent="0">
               <a:lnSpc>
                 <a:spcPct val="120000"/>
               </a:lnSpc>
@@ -3316,7 +3320,7 @@
             <a:endParaRPr lang="en-US" sz="950" dirty="0"/>
           </a:p>
           <a:p>
-            <a:pPr indent="0" marL="0">
+            <a:pPr marL="0" indent="0">
               <a:lnSpc>
                 <a:spcPct val="120000"/>
               </a:lnSpc>
@@ -3346,7 +3350,7 @@
         <p:spPr>
           <a:xfrm>
             <a:off x="3474720" y="2743200"/>
-            <a:ext cx="1234440" cy="-548640"/>
+            <a:ext cx="1234440" cy="0"/>
           </a:xfrm>
           <a:prstGeom prst="line">
             <a:avLst/>
@@ -3359,6 +3363,13 @@
             <a:prstDash val="solid"/>
           </a:ln>
         </p:spPr>
+        <p:txBody>
+          <a:bodyPr/>
+          <a:lstStyle/>
+          <a:p>
+            <a:endParaRPr lang="es-PE"/>
+          </a:p>
+        </p:txBody>
       </p:sp>
       <p:sp>
         <p:nvSpPr>
@@ -3382,6 +3393,13 @@
             <a:prstDash val="solid"/>
           </a:ln>
         </p:spPr>
+        <p:txBody>
+          <a:bodyPr/>
+          <a:lstStyle/>
+          <a:p>
+            <a:endParaRPr lang="es-PE"/>
+          </a:p>
+        </p:txBody>
       </p:sp>
       <p:sp>
         <p:nvSpPr>
@@ -3404,6 +3422,13 @@
           </a:solidFill>
           <a:ln/>
         </p:spPr>
+        <p:txBody>
+          <a:bodyPr/>
+          <a:lstStyle/>
+          <a:p>
+            <a:endParaRPr lang="es-PE"/>
+          </a:p>
+        </p:txBody>
       </p:sp>
       <p:sp>
         <p:nvSpPr>
@@ -3426,7 +3451,7 @@
           <a:bodyPr wrap="square" rtlCol="0" anchor="ctr"/>
           <a:lstStyle/>
           <a:p>
-            <a:pPr indent="0" marL="0">
+            <a:pPr marL="0" indent="0">
               <a:buNone/>
             </a:pPr>
             <a:r>
@@ -3465,7 +3490,7 @@
           <a:bodyPr wrap="square" rtlCol="0" anchor="t"/>
           <a:lstStyle/>
           <a:p>
-            <a:pPr indent="0" marL="0">
+            <a:pPr marL="0" indent="0">
               <a:lnSpc>
                 <a:spcPct val="125000"/>
               </a:lnSpc>
@@ -3507,7 +3532,7 @@
           <a:bodyPr wrap="square" rtlCol="0" anchor="t"/>
           <a:lstStyle/>
           <a:p>
-            <a:pPr indent="0" marL="0">
+            <a:pPr marL="0" indent="0">
               <a:lnSpc>
                 <a:spcPct val="125000"/>
               </a:lnSpc>
@@ -3549,7 +3574,7 @@
           <a:bodyPr wrap="square" rtlCol="0" anchor="ctr"/>
           <a:lstStyle/>
           <a:p>
-            <a:pPr indent="0" marL="0">
+            <a:pPr marL="0" indent="0">
               <a:buNone/>
             </a:pPr>
             <a:r>
@@ -3588,7 +3613,7 @@
           <a:bodyPr wrap="square" rtlCol="0" anchor="ctr"/>
           <a:lstStyle/>
           <a:p>
-            <a:pPr algn="r" indent="0" marL="0">
+            <a:pPr marL="0" indent="0" algn="r">
               <a:buNone/>
             </a:pPr>
             <a:r>
@@ -3622,6 +3647,7 @@
         <a:solidFill>
           <a:srgbClr val="F4F7F9"/>
         </a:solidFill>
+        <a:effectLst/>
       </p:bgPr>
     </p:bg>
     <p:spTree>
@@ -3659,11 +3685,11 @@
           <a:bodyPr wrap="square" rtlCol="0" anchor="ctr"/>
           <a:lstStyle/>
           <a:p>
-            <a:pPr indent="0" marL="0">
-              <a:buNone/>
-            </a:pPr>
-            <a:r>
-              <a:rPr lang="en-US" sz="1200" b="1" spc="200" kern="0" dirty="0">
+            <a:pPr marL="0" indent="0">
+              <a:buNone/>
+            </a:pPr>
+            <a:r>
+              <a:rPr lang="en-US" sz="1200" b="1" kern="0" spc="200" dirty="0">
                 <a:solidFill>
                   <a:srgbClr val="1C8C99"/>
                 </a:solidFill>
@@ -3698,7 +3724,7 @@
           <a:bodyPr wrap="square" rtlCol="0" anchor="ctr"/>
           <a:lstStyle/>
           <a:p>
-            <a:pPr indent="0" marL="0">
+            <a:pPr marL="0" indent="0">
               <a:buNone/>
             </a:pPr>
             <a:r>
@@ -3737,7 +3763,7 @@
           <a:bodyPr wrap="square" rtlCol="0" anchor="ctr"/>
           <a:lstStyle/>
           <a:p>
-            <a:pPr indent="0" marL="0">
+            <a:pPr marL="0" indent="0">
               <a:lnSpc>
                 <a:spcPct val="125000"/>
               </a:lnSpc>
@@ -3779,6 +3805,13 @@
           </a:solidFill>
           <a:ln/>
         </p:spPr>
+        <p:txBody>
+          <a:bodyPr/>
+          <a:lstStyle/>
+          <a:p>
+            <a:endParaRPr lang="es-PE"/>
+          </a:p>
+        </p:txBody>
       </p:sp>
       <p:sp>
         <p:nvSpPr>
@@ -3801,7 +3834,7 @@
           <a:bodyPr wrap="square" rtlCol="0" anchor="t"/>
           <a:lstStyle/>
           <a:p>
-            <a:pPr indent="0" marL="0">
+            <a:pPr marL="0" indent="0">
               <a:lnSpc>
                 <a:spcPct val="130000"/>
               </a:lnSpc>
@@ -3821,7 +3854,7 @@
             <a:endParaRPr lang="en-US" sz="1000" dirty="0"/>
           </a:p>
           <a:p>
-            <a:pPr indent="0" marL="0">
+            <a:pPr marL="0" indent="0">
               <a:lnSpc>
                 <a:spcPct val="130000"/>
               </a:lnSpc>
@@ -3841,7 +3874,7 @@
             <a:endParaRPr lang="en-US" sz="1000" dirty="0"/>
           </a:p>
           <a:p>
-            <a:pPr indent="0" marL="0">
+            <a:pPr marL="0" indent="0">
               <a:lnSpc>
                 <a:spcPct val="130000"/>
               </a:lnSpc>
@@ -3861,7 +3894,7 @@
             <a:endParaRPr lang="en-US" sz="1000" dirty="0"/>
           </a:p>
           <a:p>
-            <a:pPr indent="0" marL="0">
+            <a:pPr marL="0" indent="0">
               <a:lnSpc>
                 <a:spcPct val="130000"/>
               </a:lnSpc>
@@ -3881,7 +3914,7 @@
             <a:endParaRPr lang="en-US" sz="1000" dirty="0"/>
           </a:p>
           <a:p>
-            <a:pPr indent="0" marL="0">
+            <a:pPr marL="0" indent="0">
               <a:lnSpc>
                 <a:spcPct val="130000"/>
               </a:lnSpc>
@@ -3901,7 +3934,7 @@
             <a:endParaRPr lang="en-US" sz="1000" dirty="0"/>
           </a:p>
           <a:p>
-            <a:pPr indent="0" marL="0">
+            <a:pPr marL="0" indent="0">
               <a:lnSpc>
                 <a:spcPct val="130000"/>
               </a:lnSpc>
@@ -3921,7 +3954,7 @@
             <a:endParaRPr lang="en-US" sz="1000" dirty="0"/>
           </a:p>
           <a:p>
-            <a:pPr indent="0" marL="0">
+            <a:pPr marL="0" indent="0">
               <a:lnSpc>
                 <a:spcPct val="130000"/>
               </a:lnSpc>
@@ -3968,6 +4001,13 @@
             <a:prstDash val="solid"/>
           </a:ln>
         </p:spPr>
+        <p:txBody>
+          <a:bodyPr/>
+          <a:lstStyle/>
+          <a:p>
+            <a:endParaRPr lang="es-PE"/>
+          </a:p>
+        </p:txBody>
       </p:sp>
       <p:sp>
         <p:nvSpPr>
@@ -3990,7 +4030,7 @@
           <a:bodyPr wrap="square" rtlCol="0" anchor="ctr"/>
           <a:lstStyle/>
           <a:p>
-            <a:pPr algn="ctr" indent="0" marL="0">
+            <a:pPr marL="0" indent="0" algn="ctr">
               <a:buNone/>
             </a:pPr>
             <a:r>
@@ -4029,7 +4069,7 @@
           <a:bodyPr wrap="square" rtlCol="0" anchor="t"/>
           <a:lstStyle/>
           <a:p>
-            <a:pPr algn="ctr" indent="0" marL="0">
+            <a:pPr marL="0" indent="0" algn="ctr">
               <a:buNone/>
             </a:pPr>
             <a:r>
@@ -4073,6 +4113,13 @@
             <a:prstDash val="solid"/>
           </a:ln>
         </p:spPr>
+        <p:txBody>
+          <a:bodyPr/>
+          <a:lstStyle/>
+          <a:p>
+            <a:endParaRPr lang="es-PE"/>
+          </a:p>
+        </p:txBody>
       </p:sp>
       <p:sp>
         <p:nvSpPr>
@@ -4095,7 +4142,7 @@
           <a:bodyPr wrap="square" rtlCol="0" anchor="ctr"/>
           <a:lstStyle/>
           <a:p>
-            <a:pPr algn="ctr" indent="0" marL="0">
+            <a:pPr marL="0" indent="0" algn="ctr">
               <a:buNone/>
             </a:pPr>
             <a:r>
@@ -4134,7 +4181,7 @@
           <a:bodyPr wrap="square" rtlCol="0" anchor="t"/>
           <a:lstStyle/>
           <a:p>
-            <a:pPr algn="ctr" indent="0" marL="0">
+            <a:pPr marL="0" indent="0" algn="ctr">
               <a:buNone/>
             </a:pPr>
             <a:r>
@@ -4178,6 +4225,13 @@
             <a:prstDash val="solid"/>
           </a:ln>
         </p:spPr>
+        <p:txBody>
+          <a:bodyPr/>
+          <a:lstStyle/>
+          <a:p>
+            <a:endParaRPr lang="es-PE"/>
+          </a:p>
+        </p:txBody>
       </p:sp>
       <p:sp>
         <p:nvSpPr>
@@ -4200,7 +4254,7 @@
           <a:bodyPr wrap="square" rtlCol="0" anchor="ctr"/>
           <a:lstStyle/>
           <a:p>
-            <a:pPr algn="ctr" indent="0" marL="0">
+            <a:pPr marL="0" indent="0" algn="ctr">
               <a:buNone/>
             </a:pPr>
             <a:r>
@@ -4239,7 +4293,7 @@
           <a:bodyPr wrap="square" rtlCol="0" anchor="t"/>
           <a:lstStyle/>
           <a:p>
-            <a:pPr algn="ctr" indent="0" marL="0">
+            <a:pPr marL="0" indent="0" algn="ctr">
               <a:buNone/>
             </a:pPr>
             <a:r>
@@ -4283,6 +4337,13 @@
             <a:prstDash val="solid"/>
           </a:ln>
         </p:spPr>
+        <p:txBody>
+          <a:bodyPr/>
+          <a:lstStyle/>
+          <a:p>
+            <a:endParaRPr lang="es-PE"/>
+          </a:p>
+        </p:txBody>
       </p:sp>
       <p:sp>
         <p:nvSpPr>
@@ -4305,7 +4366,7 @@
           <a:bodyPr wrap="square" rtlCol="0" anchor="ctr"/>
           <a:lstStyle/>
           <a:p>
-            <a:pPr algn="ctr" indent="0" marL="0">
+            <a:pPr marL="0" indent="0" algn="ctr">
               <a:buNone/>
             </a:pPr>
             <a:r>
@@ -4344,7 +4405,7 @@
           <a:bodyPr wrap="square" rtlCol="0" anchor="t"/>
           <a:lstStyle/>
           <a:p>
-            <a:pPr algn="ctr" indent="0" marL="0">
+            <a:pPr marL="0" indent="0" algn="ctr">
               <a:buNone/>
             </a:pPr>
             <a:r>
@@ -4383,7 +4444,7 @@
           <a:bodyPr wrap="square" rtlCol="0" anchor="ctr"/>
           <a:lstStyle/>
           <a:p>
-            <a:pPr indent="0" marL="0">
+            <a:pPr marL="0" indent="0">
               <a:buNone/>
             </a:pPr>
             <a:r>
@@ -4422,7 +4483,7 @@
           <a:bodyPr wrap="square" rtlCol="0" anchor="ctr"/>
           <a:lstStyle/>
           <a:p>
-            <a:pPr indent="0" marL="0">
+            <a:pPr marL="0" indent="0">
               <a:buNone/>
             </a:pPr>
             <a:r>
@@ -4461,7 +4522,7 @@
           <a:bodyPr wrap="square" rtlCol="0" anchor="ctr"/>
           <a:lstStyle/>
           <a:p>
-            <a:pPr algn="r" indent="0" marL="0">
+            <a:pPr marL="0" indent="0" algn="r">
               <a:buNone/>
             </a:pPr>
             <a:r>
@@ -4495,6 +4556,7 @@
         <a:solidFill>
           <a:srgbClr val="FFFFFF"/>
         </a:solidFill>
+        <a:effectLst/>
       </p:bgPr>
     </p:bg>
     <p:spTree>
@@ -4532,11 +4594,11 @@
           <a:bodyPr wrap="square" rtlCol="0" anchor="ctr"/>
           <a:lstStyle/>
           <a:p>
-            <a:pPr indent="0" marL="0">
-              <a:buNone/>
-            </a:pPr>
-            <a:r>
-              <a:rPr lang="en-US" sz="1200" b="1" spc="200" kern="0" dirty="0">
+            <a:pPr marL="0" indent="0">
+              <a:buNone/>
+            </a:pPr>
+            <a:r>
+              <a:rPr lang="en-US" sz="1200" b="1" kern="0" spc="200" dirty="0">
                 <a:solidFill>
                   <a:srgbClr val="1C8C99"/>
                 </a:solidFill>
@@ -4571,7 +4633,7 @@
           <a:bodyPr wrap="square" rtlCol="0" anchor="ctr"/>
           <a:lstStyle/>
           <a:p>
-            <a:pPr indent="0" marL="0">
+            <a:pPr marL="0" indent="0">
               <a:buNone/>
             </a:pPr>
             <a:r>
@@ -4610,7 +4672,7 @@
           <a:bodyPr wrap="square" rtlCol="0" anchor="ctr"/>
           <a:lstStyle/>
           <a:p>
-            <a:pPr indent="0" marL="0">
+            <a:pPr marL="0" indent="0">
               <a:lnSpc>
                 <a:spcPct val="125000"/>
               </a:lnSpc>
@@ -4657,6 +4719,13 @@
             <a:prstDash val="solid"/>
           </a:ln>
         </p:spPr>
+        <p:txBody>
+          <a:bodyPr/>
+          <a:lstStyle/>
+          <a:p>
+            <a:endParaRPr lang="es-PE"/>
+          </a:p>
+        </p:txBody>
       </p:sp>
       <p:sp>
         <p:nvSpPr>
@@ -4679,7 +4748,7 @@
           <a:bodyPr wrap="square" rtlCol="0" anchor="ctr"/>
           <a:lstStyle/>
           <a:p>
-            <a:pPr indent="0" marL="0">
+            <a:pPr marL="0" indent="0">
               <a:buNone/>
             </a:pPr>
             <a:r>
@@ -4718,7 +4787,7 @@
           <a:bodyPr wrap="square" rtlCol="0" anchor="ctr"/>
           <a:lstStyle/>
           <a:p>
-            <a:pPr indent="0" marL="0">
+            <a:pPr marL="0" indent="0">
               <a:buNone/>
             </a:pPr>
             <a:r>
@@ -4762,6 +4831,13 @@
             <a:prstDash val="solid"/>
           </a:ln>
         </p:spPr>
+        <p:txBody>
+          <a:bodyPr/>
+          <a:lstStyle/>
+          <a:p>
+            <a:endParaRPr lang="es-PE"/>
+          </a:p>
+        </p:txBody>
       </p:sp>
       <p:sp>
         <p:nvSpPr>
@@ -4784,7 +4860,7 @@
           <a:bodyPr wrap="square" rtlCol="0" anchor="ctr"/>
           <a:lstStyle/>
           <a:p>
-            <a:pPr indent="0" marL="0">
+            <a:pPr marL="0" indent="0">
               <a:buNone/>
             </a:pPr>
             <a:r>
@@ -4823,7 +4899,7 @@
           <a:bodyPr wrap="square" rtlCol="0" anchor="ctr"/>
           <a:lstStyle/>
           <a:p>
-            <a:pPr indent="0" marL="0">
+            <a:pPr marL="0" indent="0">
               <a:buNone/>
             </a:pPr>
             <a:r>
@@ -4867,6 +4943,13 @@
             <a:prstDash val="solid"/>
           </a:ln>
         </p:spPr>
+        <p:txBody>
+          <a:bodyPr/>
+          <a:lstStyle/>
+          <a:p>
+            <a:endParaRPr lang="es-PE"/>
+          </a:p>
+        </p:txBody>
       </p:sp>
       <p:sp>
         <p:nvSpPr>
@@ -4889,7 +4972,7 @@
           <a:bodyPr wrap="square" rtlCol="0" anchor="ctr"/>
           <a:lstStyle/>
           <a:p>
-            <a:pPr indent="0" marL="0">
+            <a:pPr marL="0" indent="0">
               <a:buNone/>
             </a:pPr>
             <a:r>
@@ -4928,7 +5011,7 @@
           <a:bodyPr wrap="square" rtlCol="0" anchor="ctr"/>
           <a:lstStyle/>
           <a:p>
-            <a:pPr indent="0" marL="0">
+            <a:pPr marL="0" indent="0">
               <a:buNone/>
             </a:pPr>
             <a:r>
@@ -4967,6 +5050,13 @@
           </a:solidFill>
           <a:ln/>
         </p:spPr>
+        <p:txBody>
+          <a:bodyPr/>
+          <a:lstStyle/>
+          <a:p>
+            <a:endParaRPr lang="es-PE"/>
+          </a:p>
+        </p:txBody>
       </p:sp>
       <p:sp>
         <p:nvSpPr>
@@ -4989,7 +5079,7 @@
           <a:bodyPr wrap="square" rtlCol="0" anchor="ctr"/>
           <a:lstStyle/>
           <a:p>
-            <a:pPr indent="0" marL="0">
+            <a:pPr marL="0" indent="0">
               <a:buNone/>
             </a:pPr>
             <a:r>
@@ -5028,7 +5118,7 @@
           <a:bodyPr wrap="square" rtlCol="0" anchor="t"/>
           <a:lstStyle/>
           <a:p>
-            <a:pPr indent="0" marL="0">
+            <a:pPr marL="0" indent="0">
               <a:lnSpc>
                 <a:spcPct val="120000"/>
               </a:lnSpc>
@@ -5048,7 +5138,7 @@
             <a:endParaRPr lang="en-US" sz="1050" dirty="0"/>
           </a:p>
           <a:p>
-            <a:pPr indent="0" marL="0">
+            <a:pPr marL="0" indent="0">
               <a:lnSpc>
                 <a:spcPct val="120000"/>
               </a:lnSpc>
@@ -5068,7 +5158,7 @@
             <a:endParaRPr lang="en-US" sz="1050" dirty="0"/>
           </a:p>
           <a:p>
-            <a:pPr indent="0" marL="0">
+            <a:pPr marL="0" indent="0">
               <a:lnSpc>
                 <a:spcPct val="120000"/>
               </a:lnSpc>
@@ -5088,7 +5178,7 @@
             <a:endParaRPr lang="en-US" sz="1050" dirty="0"/>
           </a:p>
           <a:p>
-            <a:pPr indent="0" marL="0">
+            <a:pPr marL="0" indent="0">
               <a:lnSpc>
                 <a:spcPct val="120000"/>
               </a:lnSpc>
@@ -5097,7 +5187,7 @@
             <a:endParaRPr lang="en-US" sz="1050" dirty="0"/>
           </a:p>
           <a:p>
-            <a:pPr indent="0" marL="0">
+            <a:pPr marL="0" indent="0">
               <a:lnSpc>
                 <a:spcPct val="120000"/>
               </a:lnSpc>
@@ -5117,7 +5207,7 @@
             <a:endParaRPr lang="en-US" sz="1050" dirty="0"/>
           </a:p>
           <a:p>
-            <a:pPr indent="0" marL="0">
+            <a:pPr marL="0" indent="0">
               <a:lnSpc>
                 <a:spcPct val="120000"/>
               </a:lnSpc>
@@ -5137,7 +5227,7 @@
             <a:endParaRPr lang="en-US" sz="1050" dirty="0"/>
           </a:p>
           <a:p>
-            <a:pPr indent="0" marL="0">
+            <a:pPr marL="0" indent="0">
               <a:lnSpc>
                 <a:spcPct val="120000"/>
               </a:lnSpc>
@@ -5157,7 +5247,7 @@
             <a:endParaRPr lang="en-US" sz="1050" dirty="0"/>
           </a:p>
           <a:p>
-            <a:pPr indent="0" marL="0">
+            <a:pPr marL="0" indent="0">
               <a:lnSpc>
                 <a:spcPct val="120000"/>
               </a:lnSpc>
@@ -5166,7 +5256,7 @@
             <a:endParaRPr lang="en-US" sz="1050" dirty="0"/>
           </a:p>
           <a:p>
-            <a:pPr indent="0" marL="0">
+            <a:pPr marL="0" indent="0">
               <a:lnSpc>
                 <a:spcPct val="120000"/>
               </a:lnSpc>
@@ -5186,7 +5276,7 @@
             <a:endParaRPr lang="en-US" sz="1050" dirty="0"/>
           </a:p>
           <a:p>
-            <a:pPr indent="0" marL="0">
+            <a:pPr marL="0" indent="0">
               <a:lnSpc>
                 <a:spcPct val="120000"/>
               </a:lnSpc>
@@ -5206,7 +5296,7 @@
             <a:endParaRPr lang="en-US" sz="1050" dirty="0"/>
           </a:p>
           <a:p>
-            <a:pPr indent="0" marL="0">
+            <a:pPr marL="0" indent="0">
               <a:lnSpc>
                 <a:spcPct val="120000"/>
               </a:lnSpc>
@@ -5215,7 +5305,7 @@
             <a:endParaRPr lang="en-US" sz="1050" dirty="0"/>
           </a:p>
           <a:p>
-            <a:pPr indent="0" marL="0">
+            <a:pPr marL="0" indent="0">
               <a:lnSpc>
                 <a:spcPct val="120000"/>
               </a:lnSpc>
@@ -5235,7 +5325,7 @@
             <a:endParaRPr lang="en-US" sz="1050" dirty="0"/>
           </a:p>
           <a:p>
-            <a:pPr indent="0" marL="0">
+            <a:pPr marL="0" indent="0">
               <a:lnSpc>
                 <a:spcPct val="120000"/>
               </a:lnSpc>
@@ -5255,7 +5345,7 @@
             <a:endParaRPr lang="en-US" sz="1050" dirty="0"/>
           </a:p>
           <a:p>
-            <a:pPr indent="0" marL="0">
+            <a:pPr marL="0" indent="0">
               <a:lnSpc>
                 <a:spcPct val="120000"/>
               </a:lnSpc>
@@ -5275,7 +5365,7 @@
             <a:endParaRPr lang="en-US" sz="1050" dirty="0"/>
           </a:p>
           <a:p>
-            <a:pPr indent="0" marL="0">
+            <a:pPr marL="0" indent="0">
               <a:lnSpc>
                 <a:spcPct val="120000"/>
               </a:lnSpc>
@@ -5284,7 +5374,7 @@
             <a:endParaRPr lang="en-US" sz="1050" dirty="0"/>
           </a:p>
           <a:p>
-            <a:pPr indent="0" marL="0">
+            <a:pPr marL="0" indent="0">
               <a:lnSpc>
                 <a:spcPct val="120000"/>
               </a:lnSpc>
@@ -5304,7 +5394,7 @@
             <a:endParaRPr lang="en-US" sz="1050" dirty="0"/>
           </a:p>
           <a:p>
-            <a:pPr indent="0" marL="0">
+            <a:pPr marL="0" indent="0">
               <a:lnSpc>
                 <a:spcPct val="120000"/>
               </a:lnSpc>
@@ -5324,7 +5414,7 @@
             <a:endParaRPr lang="en-US" sz="1050" dirty="0"/>
           </a:p>
           <a:p>
-            <a:pPr indent="0" marL="0">
+            <a:pPr marL="0" indent="0">
               <a:lnSpc>
                 <a:spcPct val="120000"/>
               </a:lnSpc>
@@ -5366,7 +5456,7 @@
           <a:bodyPr wrap="square" rtlCol="0" anchor="ctr"/>
           <a:lstStyle/>
           <a:p>
-            <a:pPr indent="0" marL="0">
+            <a:pPr marL="0" indent="0">
               <a:buNone/>
             </a:pPr>
             <a:r>
@@ -5405,7 +5495,7 @@
           <a:bodyPr wrap="square" rtlCol="0" anchor="ctr"/>
           <a:lstStyle/>
           <a:p>
-            <a:pPr algn="r" indent="0" marL="0">
+            <a:pPr marL="0" indent="0" algn="r">
               <a:buNone/>
             </a:pPr>
             <a:r>
@@ -5439,6 +5529,7 @@
         <a:solidFill>
           <a:srgbClr val="F4F7F9"/>
         </a:solidFill>
+        <a:effectLst/>
       </p:bgPr>
     </p:bg>
     <p:spTree>
@@ -5476,11 +5567,11 @@
           <a:bodyPr wrap="square" rtlCol="0" anchor="ctr"/>
           <a:lstStyle/>
           <a:p>
-            <a:pPr indent="0" marL="0">
-              <a:buNone/>
-            </a:pPr>
-            <a:r>
-              <a:rPr lang="en-US" sz="1200" b="1" spc="200" kern="0" dirty="0">
+            <a:pPr marL="0" indent="0">
+              <a:buNone/>
+            </a:pPr>
+            <a:r>
+              <a:rPr lang="en-US" sz="1200" b="1" kern="0" spc="200" dirty="0">
                 <a:solidFill>
                   <a:srgbClr val="1C8C99"/>
                 </a:solidFill>
@@ -5515,7 +5606,7 @@
           <a:bodyPr wrap="square" rtlCol="0" anchor="ctr"/>
           <a:lstStyle/>
           <a:p>
-            <a:pPr indent="0" marL="0">
+            <a:pPr marL="0" indent="0">
               <a:buNone/>
             </a:pPr>
             <a:r>
@@ -5554,13 +5645,20 @@
           </a:solidFill>
           <a:ln/>
           <a:effectLst>
-            <a:outerShdw sx="100000" sy="100000" kx="0" ky="0" algn="bl" rotWithShape="0" blurRad="76200" dist="25400" dir="5400000">
+            <a:outerShdw blurRad="76200" dist="25400" dir="5400000" algn="bl" rotWithShape="0">
               <a:srgbClr val="1B2A4A">
                 <a:alpha val="12000"/>
               </a:srgbClr>
             </a:outerShdw>
           </a:effectLst>
         </p:spPr>
+        <p:txBody>
+          <a:bodyPr/>
+          <a:lstStyle/>
+          <a:p>
+            <a:endParaRPr lang="es-PE"/>
+          </a:p>
+        </p:txBody>
       </p:sp>
       <p:sp>
         <p:nvSpPr>
@@ -5581,6 +5679,13 @@
           </a:solidFill>
           <a:ln/>
         </p:spPr>
+        <p:txBody>
+          <a:bodyPr/>
+          <a:lstStyle/>
+          <a:p>
+            <a:endParaRPr lang="es-PE"/>
+          </a:p>
+        </p:txBody>
       </p:sp>
       <p:sp>
         <p:nvSpPr>
@@ -5606,6 +5711,13 @@
             <a:prstDash val="solid"/>
           </a:ln>
         </p:spPr>
+        <p:txBody>
+          <a:bodyPr/>
+          <a:lstStyle/>
+          <a:p>
+            <a:endParaRPr lang="es-PE"/>
+          </a:p>
+        </p:txBody>
       </p:sp>
       <p:sp>
         <p:nvSpPr>
@@ -5631,6 +5743,13 @@
             <a:prstDash val="solid"/>
           </a:ln>
         </p:spPr>
+        <p:txBody>
+          <a:bodyPr/>
+          <a:lstStyle/>
+          <a:p>
+            <a:endParaRPr lang="es-PE"/>
+          </a:p>
+        </p:txBody>
       </p:sp>
       <p:sp>
         <p:nvSpPr>
@@ -5656,6 +5775,13 @@
             <a:prstDash val="solid"/>
           </a:ln>
         </p:spPr>
+        <p:txBody>
+          <a:bodyPr/>
+          <a:lstStyle/>
+          <a:p>
+            <a:endParaRPr lang="es-PE"/>
+          </a:p>
+        </p:txBody>
       </p:sp>
       <p:sp>
         <p:nvSpPr>
@@ -5678,7 +5804,7 @@
           <a:bodyPr wrap="square" rtlCol="0" anchor="ctr"/>
           <a:lstStyle/>
           <a:p>
-            <a:pPr indent="0" marL="0">
+            <a:pPr marL="0" indent="0">
               <a:buNone/>
             </a:pPr>
             <a:r>
@@ -5717,6 +5843,13 @@
           </a:solidFill>
           <a:ln/>
         </p:spPr>
+        <p:txBody>
+          <a:bodyPr/>
+          <a:lstStyle/>
+          <a:p>
+            <a:endParaRPr lang="es-PE"/>
+          </a:p>
+        </p:txBody>
       </p:sp>
       <p:sp>
         <p:nvSpPr>
@@ -5739,7 +5872,7 @@
           <a:bodyPr wrap="square" rtlCol="0" anchor="ctr"/>
           <a:lstStyle/>
           <a:p>
-            <a:pPr indent="0" marL="0">
+            <a:pPr marL="0" indent="0">
               <a:buNone/>
             </a:pPr>
             <a:r>
@@ -5778,7 +5911,7 @@
           <a:bodyPr wrap="square" rtlCol="0" anchor="ctr"/>
           <a:lstStyle/>
           <a:p>
-            <a:pPr indent="0" marL="0">
+            <a:pPr marL="0" indent="0">
               <a:buNone/>
             </a:pPr>
             <a:r>
@@ -5817,6 +5950,13 @@
           </a:solidFill>
           <a:ln/>
         </p:spPr>
+        <p:txBody>
+          <a:bodyPr/>
+          <a:lstStyle/>
+          <a:p>
+            <a:endParaRPr lang="es-PE"/>
+          </a:p>
+        </p:txBody>
       </p:sp>
       <p:sp>
         <p:nvSpPr>
@@ -5839,7 +5979,7 @@
           <a:bodyPr wrap="square" rtlCol="0" anchor="ctr"/>
           <a:lstStyle/>
           <a:p>
-            <a:pPr indent="0" marL="0">
+            <a:pPr marL="0" indent="0">
               <a:buNone/>
             </a:pPr>
             <a:r>
@@ -5878,7 +6018,7 @@
           <a:bodyPr wrap="square" rtlCol="0" anchor="ctr"/>
           <a:lstStyle/>
           <a:p>
-            <a:pPr indent="0" marL="0">
+            <a:pPr marL="0" indent="0">
               <a:buNone/>
             </a:pPr>
             <a:r>
@@ -5917,7 +6057,7 @@
           <a:bodyPr wrap="square" rtlCol="0" anchor="t"/>
           <a:lstStyle/>
           <a:p>
-            <a:pPr indent="0" marL="0">
+            <a:pPr marL="0" indent="0">
               <a:lnSpc>
                 <a:spcPct val="125000"/>
               </a:lnSpc>
@@ -5959,6 +6099,13 @@
           </a:solidFill>
           <a:ln/>
         </p:spPr>
+        <p:txBody>
+          <a:bodyPr/>
+          <a:lstStyle/>
+          <a:p>
+            <a:endParaRPr lang="es-PE"/>
+          </a:p>
+        </p:txBody>
       </p:sp>
       <p:sp>
         <p:nvSpPr>
@@ -5979,6 +6126,13 @@
           </a:solidFill>
           <a:ln/>
         </p:spPr>
+        <p:txBody>
+          <a:bodyPr/>
+          <a:lstStyle/>
+          <a:p>
+            <a:endParaRPr lang="es-PE"/>
+          </a:p>
+        </p:txBody>
       </p:sp>
       <p:sp>
         <p:nvSpPr>
@@ -6001,7 +6155,7 @@
           <a:bodyPr wrap="square" rtlCol="0" anchor="ctr"/>
           <a:lstStyle/>
           <a:p>
-            <a:pPr algn="ctr" indent="0" marL="0">
+            <a:pPr marL="0" indent="0" algn="ctr">
               <a:buNone/>
             </a:pPr>
             <a:r>
@@ -6040,7 +6194,7 @@
           <a:bodyPr wrap="square" rtlCol="0" anchor="ctr"/>
           <a:lstStyle/>
           <a:p>
-            <a:pPr indent="0" marL="0">
+            <a:pPr marL="0" indent="0">
               <a:buNone/>
             </a:pPr>
             <a:r>
@@ -6077,6 +6231,13 @@
           </a:solidFill>
           <a:ln/>
         </p:spPr>
+        <p:txBody>
+          <a:bodyPr/>
+          <a:lstStyle/>
+          <a:p>
+            <a:endParaRPr lang="es-PE"/>
+          </a:p>
+        </p:txBody>
       </p:sp>
       <p:sp>
         <p:nvSpPr>
@@ -6099,7 +6260,7 @@
           <a:bodyPr wrap="square" rtlCol="0" anchor="ctr"/>
           <a:lstStyle/>
           <a:p>
-            <a:pPr algn="ctr" indent="0" marL="0">
+            <a:pPr marL="0" indent="0" algn="ctr">
               <a:buNone/>
             </a:pPr>
             <a:r>
@@ -6138,7 +6299,7 @@
           <a:bodyPr wrap="square" rtlCol="0" anchor="ctr"/>
           <a:lstStyle/>
           <a:p>
-            <a:pPr indent="0" marL="0">
+            <a:pPr marL="0" indent="0">
               <a:buNone/>
             </a:pPr>
             <a:r>
@@ -6175,6 +6336,13 @@
           </a:solidFill>
           <a:ln/>
         </p:spPr>
+        <p:txBody>
+          <a:bodyPr/>
+          <a:lstStyle/>
+          <a:p>
+            <a:endParaRPr lang="es-PE"/>
+          </a:p>
+        </p:txBody>
       </p:sp>
       <p:sp>
         <p:nvSpPr>
@@ -6197,7 +6365,7 @@
           <a:bodyPr wrap="square" rtlCol="0" anchor="ctr"/>
           <a:lstStyle/>
           <a:p>
-            <a:pPr algn="ctr" indent="0" marL="0">
+            <a:pPr marL="0" indent="0" algn="ctr">
               <a:buNone/>
             </a:pPr>
             <a:r>
@@ -6236,7 +6404,7 @@
           <a:bodyPr wrap="square" rtlCol="0" anchor="ctr"/>
           <a:lstStyle/>
           <a:p>
-            <a:pPr indent="0" marL="0">
+            <a:pPr marL="0" indent="0">
               <a:buNone/>
             </a:pPr>
             <a:r>
@@ -6273,6 +6441,13 @@
           </a:solidFill>
           <a:ln/>
         </p:spPr>
+        <p:txBody>
+          <a:bodyPr/>
+          <a:lstStyle/>
+          <a:p>
+            <a:endParaRPr lang="es-PE"/>
+          </a:p>
+        </p:txBody>
       </p:sp>
       <p:sp>
         <p:nvSpPr>
@@ -6295,7 +6470,7 @@
           <a:bodyPr wrap="square" rtlCol="0" anchor="ctr"/>
           <a:lstStyle/>
           <a:p>
-            <a:pPr algn="ctr" indent="0" marL="0">
+            <a:pPr marL="0" indent="0" algn="ctr">
               <a:buNone/>
             </a:pPr>
             <a:r>
@@ -6334,7 +6509,7 @@
           <a:bodyPr wrap="square" rtlCol="0" anchor="ctr"/>
           <a:lstStyle/>
           <a:p>
-            <a:pPr indent="0" marL="0">
+            <a:pPr marL="0" indent="0">
               <a:buNone/>
             </a:pPr>
             <a:r>
@@ -6373,6 +6548,13 @@
           </a:solidFill>
           <a:ln/>
         </p:spPr>
+        <p:txBody>
+          <a:bodyPr/>
+          <a:lstStyle/>
+          <a:p>
+            <a:endParaRPr lang="es-PE"/>
+          </a:p>
+        </p:txBody>
       </p:sp>
       <p:sp>
         <p:nvSpPr>
@@ -6395,7 +6577,7 @@
           <a:bodyPr wrap="square" rtlCol="0" anchor="t"/>
           <a:lstStyle/>
           <a:p>
-            <a:pPr indent="0" marL="0">
+            <a:pPr marL="0" indent="0">
               <a:lnSpc>
                 <a:spcPct val="125000"/>
               </a:lnSpc>
@@ -6415,7 +6597,7 @@
             <a:endParaRPr lang="en-US" sz="950" dirty="0"/>
           </a:p>
           <a:p>
-            <a:pPr indent="0" marL="0">
+            <a:pPr marL="0" indent="0">
               <a:lnSpc>
                 <a:spcPct val="125000"/>
               </a:lnSpc>
@@ -6435,7 +6617,7 @@
             <a:endParaRPr lang="en-US" sz="950" dirty="0"/>
           </a:p>
           <a:p>
-            <a:pPr indent="0" marL="0">
+            <a:pPr marL="0" indent="0">
               <a:lnSpc>
                 <a:spcPct val="125000"/>
               </a:lnSpc>
@@ -6477,7 +6659,7 @@
           <a:bodyPr wrap="square" rtlCol="0" anchor="ctr"/>
           <a:lstStyle/>
           <a:p>
-            <a:pPr indent="0" marL="0">
+            <a:pPr marL="0" indent="0">
               <a:buNone/>
             </a:pPr>
             <a:r>
@@ -6516,7 +6698,7 @@
           <a:bodyPr wrap="square" rtlCol="0" anchor="ctr"/>
           <a:lstStyle/>
           <a:p>
-            <a:pPr algn="r" indent="0" marL="0">
+            <a:pPr marL="0" indent="0" algn="r">
               <a:buNone/>
             </a:pPr>
             <a:r>
@@ -6548,8 +6730,9 @@
     <p:bg>
       <p:bgPr>
         <a:solidFill>
-          <a:srgbClr val="121D33"/>
+          <a:srgbClr val="FFFFFF"/>
         </a:solidFill>
+        <a:effectLst/>
       </p:bgPr>
     </p:bg>
     <p:spTree>
@@ -6568,6 +6751,253 @@
       </p:grpSpPr>
       <p:sp>
         <p:nvSpPr>
+          <p:cNvPr id="2" name="Text 0"/>
+          <p:cNvSpPr/>
+          <p:nvPr/>
+        </p:nvSpPr>
+        <p:spPr>
+          <a:xfrm>
+            <a:off x="548640" y="384048"/>
+            <a:ext cx="7315200" cy="320040"/>
+          </a:xfrm>
+          <a:prstGeom prst="rect">
+            <a:avLst/>
+          </a:prstGeom>
+          <a:noFill/>
+          <a:ln/>
+        </p:spPr>
+        <p:txBody>
+          <a:bodyPr wrap="square" rtlCol="0" anchor="ctr"/>
+          <a:lstStyle/>
+          <a:p>
+            <a:pPr marL="0" indent="0">
+              <a:buNone/>
+            </a:pPr>
+            <a:r>
+              <a:rPr lang="en-US" sz="1200" b="1" kern="0" spc="200" dirty="0">
+                <a:solidFill>
+                  <a:srgbClr val="1C8C99"/>
+                </a:solidFill>
+                <a:latin typeface="Calibri" pitchFamily="34" charset="0"/>
+                <a:ea typeface="Calibri" pitchFamily="34" charset="-122"/>
+                <a:cs typeface="Calibri" pitchFamily="34" charset="-120"/>
+              </a:rPr>
+              <a:t>VISTA COMPLETA</a:t>
+            </a:r>
+            <a:endParaRPr lang="en-US" sz="1200" dirty="0"/>
+          </a:p>
+        </p:txBody>
+      </p:sp>
+      <p:sp>
+        <p:nvSpPr>
+          <p:cNvPr id="3" name="Text 1"/>
+          <p:cNvSpPr/>
+          <p:nvPr/>
+        </p:nvSpPr>
+        <p:spPr>
+          <a:xfrm>
+            <a:off x="548640" y="685800"/>
+            <a:ext cx="11064240" cy="457200"/>
+          </a:xfrm>
+          <a:prstGeom prst="rect">
+            <a:avLst/>
+          </a:prstGeom>
+          <a:noFill/>
+          <a:ln/>
+        </p:spPr>
+        <p:txBody>
+          <a:bodyPr wrap="square" rtlCol="0" anchor="ctr"/>
+          <a:lstStyle/>
+          <a:p>
+            <a:pPr marL="0" indent="0">
+              <a:buNone/>
+            </a:pPr>
+            <a:r>
+              <a:rPr lang="en-US" sz="2400" b="1" dirty="0">
+                <a:solidFill>
+                  <a:srgbClr val="1B2A4A"/>
+                </a:solidFill>
+                <a:latin typeface="Cambria" pitchFamily="34" charset="0"/>
+                <a:ea typeface="Cambria" pitchFamily="34" charset="-122"/>
+                <a:cs typeface="Cambria" pitchFamily="34" charset="-120"/>
+              </a:rPr>
+              <a:t>Diagrama de arquitectura completo</a:t>
+            </a:r>
+            <a:endParaRPr lang="en-US" sz="2400" dirty="0"/>
+          </a:p>
+        </p:txBody>
+      </p:sp>
+      <p:sp>
+        <p:nvSpPr>
+          <p:cNvPr id="4" name="Shape 2"/>
+          <p:cNvSpPr/>
+          <p:nvPr/>
+        </p:nvSpPr>
+        <p:spPr>
+          <a:xfrm>
+            <a:off x="2009394" y="1161288"/>
+            <a:ext cx="8170164" cy="5495544"/>
+          </a:xfrm>
+          <a:prstGeom prst="roundRect">
+            <a:avLst>
+              <a:gd name="adj" fmla="val 998"/>
+            </a:avLst>
+          </a:prstGeom>
+          <a:solidFill>
+            <a:srgbClr val="F4F7F9"/>
+          </a:solidFill>
+          <a:ln w="12700">
+            <a:solidFill>
+              <a:srgbClr val="D6DEE7"/>
+            </a:solidFill>
+            <a:prstDash val="solid"/>
+          </a:ln>
+        </p:spPr>
+        <p:txBody>
+          <a:bodyPr/>
+          <a:lstStyle/>
+          <a:p>
+            <a:endParaRPr lang="es-PE"/>
+          </a:p>
+        </p:txBody>
+      </p:sp>
+      <p:pic>
+        <p:nvPicPr>
+          <p:cNvPr id="5" name="Image 0" descr="/home/claude/work/ppt/diagrama_arquitectura.png"/>
+          <p:cNvPicPr>
+            <a:picLocks noChangeAspect="1"/>
+          </p:cNvPicPr>
+          <p:nvPr/>
+        </p:nvPicPr>
+        <p:blipFill>
+          <a:blip r:embed="rId3"/>
+          <a:stretch>
+            <a:fillRect/>
+          </a:stretch>
+        </p:blipFill>
+        <p:spPr>
+          <a:xfrm>
+            <a:off x="2082546" y="1234440"/>
+            <a:ext cx="8023860" cy="5349240"/>
+          </a:xfrm>
+          <a:prstGeom prst="rect">
+            <a:avLst/>
+          </a:prstGeom>
+        </p:spPr>
+      </p:pic>
+      <p:sp>
+        <p:nvSpPr>
+          <p:cNvPr id="6" name="Text 3"/>
+          <p:cNvSpPr/>
+          <p:nvPr/>
+        </p:nvSpPr>
+        <p:spPr>
+          <a:xfrm>
+            <a:off x="457200" y="6473952"/>
+            <a:ext cx="8229600" cy="274320"/>
+          </a:xfrm>
+          <a:prstGeom prst="rect">
+            <a:avLst/>
+          </a:prstGeom>
+          <a:noFill/>
+          <a:ln/>
+        </p:spPr>
+        <p:txBody>
+          <a:bodyPr wrap="square" rtlCol="0" anchor="ctr"/>
+          <a:lstStyle/>
+          <a:p>
+            <a:pPr marL="0" indent="0">
+              <a:buNone/>
+            </a:pPr>
+            <a:r>
+              <a:rPr lang="en-US" sz="900" dirty="0">
+                <a:solidFill>
+                  <a:srgbClr val="5C6B7F"/>
+                </a:solidFill>
+                <a:latin typeface="Calibri" pitchFamily="34" charset="0"/>
+                <a:ea typeface="Calibri" pitchFamily="34" charset="-122"/>
+                <a:cs typeface="Calibri" pitchFamily="34" charset="-120"/>
+              </a:rPr>
+              <a:t>Motor de Scoring Crediticio · Arquitectura Hexagonal + RabbitMQ + Kafka</a:t>
+            </a:r>
+            <a:endParaRPr lang="en-US" sz="900" dirty="0"/>
+          </a:p>
+        </p:txBody>
+      </p:sp>
+      <p:sp>
+        <p:nvSpPr>
+          <p:cNvPr id="7" name="Text 4"/>
+          <p:cNvSpPr/>
+          <p:nvPr/>
+        </p:nvSpPr>
+        <p:spPr>
+          <a:xfrm>
+            <a:off x="11365992" y="6473952"/>
+            <a:ext cx="365760" cy="274320"/>
+          </a:xfrm>
+          <a:prstGeom prst="rect">
+            <a:avLst/>
+          </a:prstGeom>
+          <a:noFill/>
+          <a:ln/>
+        </p:spPr>
+        <p:txBody>
+          <a:bodyPr wrap="square" rtlCol="0" anchor="ctr"/>
+          <a:lstStyle/>
+          <a:p>
+            <a:pPr marL="0" indent="0" algn="r">
+              <a:buNone/>
+            </a:pPr>
+            <a:r>
+              <a:rPr lang="en-US" sz="900" dirty="0">
+                <a:solidFill>
+                  <a:srgbClr val="5C6B7F"/>
+                </a:solidFill>
+                <a:latin typeface="Calibri" pitchFamily="34" charset="0"/>
+                <a:ea typeface="Calibri" pitchFamily="34" charset="-122"/>
+                <a:cs typeface="Calibri" pitchFamily="34" charset="-120"/>
+              </a:rPr>
+              <a:t>14</a:t>
+            </a:r>
+            <a:endParaRPr lang="en-US" sz="900" dirty="0"/>
+          </a:p>
+        </p:txBody>
+      </p:sp>
+    </p:spTree>
+  </p:cSld>
+  <p:clrMapOvr>
+    <a:masterClrMapping/>
+  </p:clrMapOvr>
+</p:sld>
+</file>
+
+<file path=ppt/slides/slide15.xml><?xml version="1.0" encoding="utf-8"?>
+<p:sld xmlns:a="http://schemas.openxmlformats.org/drawingml/2006/main" xmlns:r="http://schemas.openxmlformats.org/officeDocument/2006/relationships" xmlns:p="http://schemas.openxmlformats.org/presentationml/2006/main">
+  <p:cSld name="Slide 15">
+    <p:bg>
+      <p:bgPr>
+        <a:solidFill>
+          <a:srgbClr val="121D33"/>
+        </a:solidFill>
+        <a:effectLst/>
+      </p:bgPr>
+    </p:bg>
+    <p:spTree>
+      <p:nvGrpSpPr>
+        <p:cNvPr id="1" name=""/>
+        <p:cNvGrpSpPr/>
+        <p:nvPr/>
+      </p:nvGrpSpPr>
+      <p:grpSpPr>
+        <a:xfrm>
+          <a:off x="0" y="0"/>
+          <a:ext cx="0" cy="0"/>
+          <a:chOff x="0" y="0"/>
+          <a:chExt cx="0" cy="0"/>
+        </a:xfrm>
+      </p:grpSpPr>
+      <p:sp>
+        <p:nvSpPr>
           <p:cNvPr id="2" name="Shape 0"/>
           <p:cNvSpPr/>
           <p:nvPr/>
@@ -6585,6 +7015,13 @@
           </a:solidFill>
           <a:ln/>
         </p:spPr>
+        <p:txBody>
+          <a:bodyPr/>
+          <a:lstStyle/>
+          <a:p>
+            <a:endParaRPr lang="es-PE"/>
+          </a:p>
+        </p:txBody>
       </p:sp>
       <p:sp>
         <p:nvSpPr>
@@ -6605,6 +7042,13 @@
           </a:solidFill>
           <a:ln/>
         </p:spPr>
+        <p:txBody>
+          <a:bodyPr/>
+          <a:lstStyle/>
+          <a:p>
+            <a:endParaRPr lang="es-PE"/>
+          </a:p>
+        </p:txBody>
       </p:sp>
       <p:sp>
         <p:nvSpPr>
@@ -6627,11 +7071,11 @@
           <a:bodyPr wrap="square" rtlCol="0" anchor="ctr"/>
           <a:lstStyle/>
           <a:p>
-            <a:pPr indent="0" marL="0">
-              <a:buNone/>
-            </a:pPr>
-            <a:r>
-              <a:rPr lang="en-US" sz="1200" b="1" spc="200" kern="0" dirty="0">
+            <a:pPr marL="0" indent="0">
+              <a:buNone/>
+            </a:pPr>
+            <a:r>
+              <a:rPr lang="en-US" sz="1200" b="1" kern="0" spc="200" dirty="0">
                 <a:solidFill>
                   <a:srgbClr val="1C8C99"/>
                 </a:solidFill>
@@ -6666,7 +7110,7 @@
           <a:bodyPr wrap="square" rtlCol="0" anchor="ctr"/>
           <a:lstStyle/>
           <a:p>
-            <a:pPr indent="0" marL="0">
+            <a:pPr marL="0" indent="0">
               <a:buNone/>
             </a:pPr>
             <a:r>
@@ -6710,6 +7154,13 @@
             <a:prstDash val="solid"/>
           </a:ln>
         </p:spPr>
+        <p:txBody>
+          <a:bodyPr/>
+          <a:lstStyle/>
+          <a:p>
+            <a:endParaRPr lang="es-PE"/>
+          </a:p>
+        </p:txBody>
       </p:sp>
       <p:sp>
         <p:nvSpPr>
@@ -6732,7 +7183,7 @@
           <a:bodyPr wrap="square" rtlCol="0" anchor="ctr"/>
           <a:lstStyle/>
           <a:p>
-            <a:pPr indent="0" marL="0">
+            <a:pPr marL="0" indent="0">
               <a:buNone/>
             </a:pPr>
             <a:r>
@@ -6771,7 +7222,7 @@
           <a:bodyPr wrap="square" rtlCol="0" anchor="t"/>
           <a:lstStyle/>
           <a:p>
-            <a:pPr indent="0" marL="0">
+            <a:pPr marL="0" indent="0">
               <a:lnSpc>
                 <a:spcPct val="125000"/>
               </a:lnSpc>
@@ -6818,6 +7269,13 @@
             <a:prstDash val="solid"/>
           </a:ln>
         </p:spPr>
+        <p:txBody>
+          <a:bodyPr/>
+          <a:lstStyle/>
+          <a:p>
+            <a:endParaRPr lang="es-PE"/>
+          </a:p>
+        </p:txBody>
       </p:sp>
       <p:sp>
         <p:nvSpPr>
@@ -6840,7 +7298,7 @@
           <a:bodyPr wrap="square" rtlCol="0" anchor="ctr"/>
           <a:lstStyle/>
           <a:p>
-            <a:pPr indent="0" marL="0">
+            <a:pPr marL="0" indent="0">
               <a:buNone/>
             </a:pPr>
             <a:r>
@@ -6879,7 +7337,7 @@
           <a:bodyPr wrap="square" rtlCol="0" anchor="t"/>
           <a:lstStyle/>
           <a:p>
-            <a:pPr indent="0" marL="0">
+            <a:pPr marL="0" indent="0">
               <a:lnSpc>
                 <a:spcPct val="125000"/>
               </a:lnSpc>
@@ -6926,6 +7384,13 @@
             <a:prstDash val="solid"/>
           </a:ln>
         </p:spPr>
+        <p:txBody>
+          <a:bodyPr/>
+          <a:lstStyle/>
+          <a:p>
+            <a:endParaRPr lang="es-PE"/>
+          </a:p>
+        </p:txBody>
       </p:sp>
       <p:sp>
         <p:nvSpPr>
@@ -6948,7 +7413,7 @@
           <a:bodyPr wrap="square" rtlCol="0" anchor="ctr"/>
           <a:lstStyle/>
           <a:p>
-            <a:pPr indent="0" marL="0">
+            <a:pPr marL="0" indent="0">
               <a:buNone/>
             </a:pPr>
             <a:r>
@@ -6987,7 +7452,7 @@
           <a:bodyPr wrap="square" rtlCol="0" anchor="t"/>
           <a:lstStyle/>
           <a:p>
-            <a:pPr indent="0" marL="0">
+            <a:pPr marL="0" indent="0">
               <a:lnSpc>
                 <a:spcPct val="125000"/>
               </a:lnSpc>
@@ -7034,6 +7499,13 @@
             <a:prstDash val="solid"/>
           </a:ln>
         </p:spPr>
+        <p:txBody>
+          <a:bodyPr/>
+          <a:lstStyle/>
+          <a:p>
+            <a:endParaRPr lang="es-PE"/>
+          </a:p>
+        </p:txBody>
       </p:sp>
       <p:sp>
         <p:nvSpPr>
@@ -7056,7 +7528,7 @@
           <a:bodyPr wrap="square" rtlCol="0" anchor="ctr"/>
           <a:lstStyle/>
           <a:p>
-            <a:pPr indent="0" marL="0">
+            <a:pPr marL="0" indent="0">
               <a:buNone/>
             </a:pPr>
             <a:r>
@@ -7095,7 +7567,7 @@
           <a:bodyPr wrap="square" rtlCol="0" anchor="t"/>
           <a:lstStyle/>
           <a:p>
-            <a:pPr indent="0" marL="0">
+            <a:pPr marL="0" indent="0">
               <a:lnSpc>
                 <a:spcPct val="125000"/>
               </a:lnSpc>
@@ -7137,7 +7609,7 @@
           <a:bodyPr wrap="square" rtlCol="0" anchor="ctr"/>
           <a:lstStyle/>
           <a:p>
-            <a:pPr indent="0" marL="0">
+            <a:pPr marL="0" indent="0">
               <a:buNone/>
             </a:pPr>
             <a:r>
@@ -7176,7 +7648,7 @@
           <a:bodyPr wrap="square" rtlCol="0" anchor="ctr"/>
           <a:lstStyle/>
           <a:p>
-            <a:pPr algn="r" indent="0" marL="0">
+            <a:pPr marL="0" indent="0" algn="r">
               <a:buNone/>
             </a:pPr>
             <a:r>
@@ -7188,7 +7660,7 @@
                 <a:ea typeface="Calibri" pitchFamily="34" charset="-122"/>
                 <a:cs typeface="Calibri" pitchFamily="34" charset="-120"/>
               </a:rPr>
-              <a:t>14</a:t>
+              <a:t>15</a:t>
             </a:r>
             <a:endParaRPr lang="en-US" sz="900" dirty="0"/>
           </a:p>
@@ -7210,6 +7682,7 @@
         <a:solidFill>
           <a:srgbClr val="F4F7F9"/>
         </a:solidFill>
+        <a:effectLst/>
       </p:bgPr>
     </p:bg>
     <p:spTree>
@@ -7247,11 +7720,11 @@
           <a:bodyPr wrap="square" rtlCol="0" anchor="ctr"/>
           <a:lstStyle/>
           <a:p>
-            <a:pPr indent="0" marL="0">
-              <a:buNone/>
-            </a:pPr>
-            <a:r>
-              <a:rPr lang="en-US" sz="1200" b="1" spc="200" kern="0" dirty="0">
+            <a:pPr marL="0" indent="0">
+              <a:buNone/>
+            </a:pPr>
+            <a:r>
+              <a:rPr lang="en-US" sz="1200" b="1" kern="0" spc="200" dirty="0">
                 <a:solidFill>
                   <a:srgbClr val="1C8C99"/>
                 </a:solidFill>
@@ -7286,7 +7759,7 @@
           <a:bodyPr wrap="square" rtlCol="0" anchor="ctr"/>
           <a:lstStyle/>
           <a:p>
-            <a:pPr indent="0" marL="0">
+            <a:pPr marL="0" indent="0">
               <a:buNone/>
             </a:pPr>
             <a:r>
@@ -7325,7 +7798,7 @@
           <a:bodyPr wrap="square" rtlCol="0" anchor="t"/>
           <a:lstStyle/>
           <a:p>
-            <a:pPr indent="0" marL="0">
+            <a:pPr marL="0" indent="0">
               <a:buNone/>
             </a:pPr>
             <a:r>
@@ -7364,7 +7837,7 @@
           <a:bodyPr wrap="square" rtlCol="0" anchor="t"/>
           <a:lstStyle/>
           <a:p>
-            <a:pPr indent="0" marL="0">
+            <a:pPr marL="0" indent="0">
               <a:buNone/>
             </a:pPr>
             <a:r>
@@ -7403,7 +7876,7 @@
           <a:bodyPr wrap="square" rtlCol="0" anchor="t"/>
           <a:lstStyle/>
           <a:p>
-            <a:pPr indent="0" marL="0">
+            <a:pPr marL="0" indent="0">
               <a:buNone/>
             </a:pPr>
             <a:r>
@@ -7442,7 +7915,7 @@
           <a:bodyPr wrap="square" rtlCol="0" anchor="t"/>
           <a:lstStyle/>
           <a:p>
-            <a:pPr indent="0" marL="0">
+            <a:pPr marL="0" indent="0">
               <a:buNone/>
             </a:pPr>
             <a:r>
@@ -7481,7 +7954,7 @@
           <a:bodyPr wrap="square" rtlCol="0" anchor="t"/>
           <a:lstStyle/>
           <a:p>
-            <a:pPr indent="0" marL="0">
+            <a:pPr marL="0" indent="0">
               <a:buNone/>
             </a:pPr>
             <a:r>
@@ -7520,7 +7993,7 @@
           <a:bodyPr wrap="square" rtlCol="0" anchor="t"/>
           <a:lstStyle/>
           <a:p>
-            <a:pPr indent="0" marL="0">
+            <a:pPr marL="0" indent="0">
               <a:buNone/>
             </a:pPr>
             <a:r>
@@ -7559,7 +8032,7 @@
           <a:bodyPr wrap="square" rtlCol="0" anchor="t"/>
           <a:lstStyle/>
           <a:p>
-            <a:pPr indent="0" marL="0">
+            <a:pPr marL="0" indent="0">
               <a:buNone/>
             </a:pPr>
             <a:r>
@@ -7598,7 +8071,7 @@
           <a:bodyPr wrap="square" rtlCol="0" anchor="t"/>
           <a:lstStyle/>
           <a:p>
-            <a:pPr indent="0" marL="0">
+            <a:pPr marL="0" indent="0">
               <a:buNone/>
             </a:pPr>
             <a:r>
@@ -7637,7 +8110,7 @@
           <a:bodyPr wrap="square" rtlCol="0" anchor="t"/>
           <a:lstStyle/>
           <a:p>
-            <a:pPr indent="0" marL="0">
+            <a:pPr marL="0" indent="0">
               <a:buNone/>
             </a:pPr>
             <a:r>
@@ -7676,7 +8149,7 @@
           <a:bodyPr wrap="square" rtlCol="0" anchor="t"/>
           <a:lstStyle/>
           <a:p>
-            <a:pPr indent="0" marL="0">
+            <a:pPr marL="0" indent="0">
               <a:buNone/>
             </a:pPr>
             <a:r>
@@ -7715,7 +8188,7 @@
           <a:bodyPr wrap="square" rtlCol="0" anchor="t"/>
           <a:lstStyle/>
           <a:p>
-            <a:pPr indent="0" marL="0">
+            <a:pPr marL="0" indent="0">
               <a:buNone/>
             </a:pPr>
             <a:r>
@@ -7754,7 +8227,7 @@
           <a:bodyPr wrap="square" rtlCol="0" anchor="t"/>
           <a:lstStyle/>
           <a:p>
-            <a:pPr indent="0" marL="0">
+            <a:pPr marL="0" indent="0">
               <a:buNone/>
             </a:pPr>
             <a:r>
@@ -7793,7 +8266,7 @@
           <a:bodyPr wrap="square" rtlCol="0" anchor="t"/>
           <a:lstStyle/>
           <a:p>
-            <a:pPr indent="0" marL="0">
+            <a:pPr marL="0" indent="0">
               <a:buNone/>
             </a:pPr>
             <a:r>
@@ -7832,7 +8305,7 @@
           <a:bodyPr wrap="square" rtlCol="0" anchor="t"/>
           <a:lstStyle/>
           <a:p>
-            <a:pPr indent="0" marL="0">
+            <a:pPr marL="0" indent="0">
               <a:buNone/>
             </a:pPr>
             <a:r>
@@ -7871,7 +8344,7 @@
           <a:bodyPr wrap="square" rtlCol="0" anchor="t"/>
           <a:lstStyle/>
           <a:p>
-            <a:pPr indent="0" marL="0">
+            <a:pPr marL="0" indent="0">
               <a:buNone/>
             </a:pPr>
             <a:r>
@@ -7910,7 +8383,7 @@
           <a:bodyPr wrap="square" rtlCol="0" anchor="t"/>
           <a:lstStyle/>
           <a:p>
-            <a:pPr indent="0" marL="0">
+            <a:pPr marL="0" indent="0">
               <a:buNone/>
             </a:pPr>
             <a:r>
@@ -7949,7 +8422,7 @@
           <a:bodyPr wrap="square" rtlCol="0" anchor="t"/>
           <a:lstStyle/>
           <a:p>
-            <a:pPr indent="0" marL="0">
+            <a:pPr marL="0" indent="0">
               <a:buNone/>
             </a:pPr>
             <a:r>
@@ -7988,7 +8461,7 @@
           <a:bodyPr wrap="square" rtlCol="0" anchor="t"/>
           <a:lstStyle/>
           <a:p>
-            <a:pPr indent="0" marL="0">
+            <a:pPr marL="0" indent="0">
               <a:buNone/>
             </a:pPr>
             <a:r>
@@ -8027,7 +8500,7 @@
           <a:bodyPr wrap="square" rtlCol="0" anchor="t"/>
           <a:lstStyle/>
           <a:p>
-            <a:pPr indent="0" marL="0">
+            <a:pPr marL="0" indent="0">
               <a:buNone/>
             </a:pPr>
             <a:r>
@@ -8066,7 +8539,7 @@
           <a:bodyPr wrap="square" rtlCol="0" anchor="t"/>
           <a:lstStyle/>
           <a:p>
-            <a:pPr indent="0" marL="0">
+            <a:pPr marL="0" indent="0">
               <a:buNone/>
             </a:pPr>
             <a:r>
@@ -8105,7 +8578,7 @@
           <a:bodyPr wrap="square" rtlCol="0" anchor="t"/>
           <a:lstStyle/>
           <a:p>
-            <a:pPr indent="0" marL="0">
+            <a:pPr marL="0" indent="0">
               <a:buNone/>
             </a:pPr>
             <a:r>
@@ -8144,7 +8617,7 @@
           <a:bodyPr wrap="square" rtlCol="0" anchor="t"/>
           <a:lstStyle/>
           <a:p>
-            <a:pPr indent="0" marL="0">
+            <a:pPr marL="0" indent="0">
               <a:buNone/>
             </a:pPr>
             <a:r>
@@ -8183,7 +8656,7 @@
           <a:bodyPr wrap="square" rtlCol="0" anchor="t"/>
           <a:lstStyle/>
           <a:p>
-            <a:pPr indent="0" marL="0">
+            <a:pPr marL="0" indent="0">
               <a:buNone/>
             </a:pPr>
             <a:r>
@@ -8222,7 +8695,7 @@
           <a:bodyPr wrap="square" rtlCol="0" anchor="t"/>
           <a:lstStyle/>
           <a:p>
-            <a:pPr indent="0" marL="0">
+            <a:pPr marL="0" indent="0">
               <a:buNone/>
             </a:pPr>
             <a:r>
@@ -8261,7 +8734,7 @@
           <a:bodyPr wrap="square" rtlCol="0" anchor="ctr"/>
           <a:lstStyle/>
           <a:p>
-            <a:pPr indent="0" marL="0">
+            <a:pPr marL="0" indent="0">
               <a:buNone/>
             </a:pPr>
             <a:r>
@@ -8300,7 +8773,7 @@
           <a:bodyPr wrap="square" rtlCol="0" anchor="ctr"/>
           <a:lstStyle/>
           <a:p>
-            <a:pPr algn="r" indent="0" marL="0">
+            <a:pPr marL="0" indent="0" algn="r">
               <a:buNone/>
             </a:pPr>
             <a:r>
@@ -8334,6 +8807,7 @@
         <a:solidFill>
           <a:srgbClr val="FFFFFF"/>
         </a:solidFill>
+        <a:effectLst/>
       </p:bgPr>
     </p:bg>
     <p:spTree>
@@ -8371,11 +8845,11 @@
           <a:bodyPr wrap="square" rtlCol="0" anchor="ctr"/>
           <a:lstStyle/>
           <a:p>
-            <a:pPr indent="0" marL="0">
-              <a:buNone/>
-            </a:pPr>
-            <a:r>
-              <a:rPr lang="en-US" sz="1200" b="1" spc="200" kern="0" dirty="0">
+            <a:pPr marL="0" indent="0">
+              <a:buNone/>
+            </a:pPr>
+            <a:r>
+              <a:rPr lang="en-US" sz="1200" b="1" kern="0" spc="200" dirty="0">
                 <a:solidFill>
                   <a:srgbClr val="1C8C99"/>
                 </a:solidFill>
@@ -8410,7 +8884,7 @@
           <a:bodyPr wrap="square" rtlCol="0" anchor="ctr"/>
           <a:lstStyle/>
           <a:p>
-            <a:pPr indent="0" marL="0">
+            <a:pPr marL="0" indent="0">
               <a:buNone/>
             </a:pPr>
             <a:r>
@@ -8449,7 +8923,7 @@
           <a:bodyPr wrap="square" rtlCol="0" anchor="t"/>
           <a:lstStyle/>
           <a:p>
-            <a:pPr indent="0" marL="0">
+            <a:pPr marL="0" indent="0">
               <a:lnSpc>
                 <a:spcPct val="125000"/>
               </a:lnSpc>
@@ -8489,6 +8963,13 @@
           </a:solidFill>
           <a:ln/>
         </p:spPr>
+        <p:txBody>
+          <a:bodyPr/>
+          <a:lstStyle/>
+          <a:p>
+            <a:endParaRPr lang="es-PE"/>
+          </a:p>
+        </p:txBody>
       </p:sp>
       <p:sp>
         <p:nvSpPr>
@@ -8511,7 +8992,7 @@
           <a:bodyPr wrap="square" rtlCol="0" anchor="ctr"/>
           <a:lstStyle/>
           <a:p>
-            <a:pPr algn="ctr" indent="0" marL="0">
+            <a:pPr marL="0" indent="0" algn="ctr">
               <a:buNone/>
             </a:pPr>
             <a:r>
@@ -8550,7 +9031,7 @@
           <a:bodyPr wrap="square" rtlCol="0" anchor="ctr"/>
           <a:lstStyle/>
           <a:p>
-            <a:pPr indent="0" marL="0">
+            <a:pPr marL="0" indent="0">
               <a:buNone/>
             </a:pPr>
             <a:r>
@@ -8587,6 +9068,13 @@
           </a:solidFill>
           <a:ln/>
         </p:spPr>
+        <p:txBody>
+          <a:bodyPr/>
+          <a:lstStyle/>
+          <a:p>
+            <a:endParaRPr lang="es-PE"/>
+          </a:p>
+        </p:txBody>
       </p:sp>
       <p:sp>
         <p:nvSpPr>
@@ -8609,7 +9097,7 @@
           <a:bodyPr wrap="square" rtlCol="0" anchor="ctr"/>
           <a:lstStyle/>
           <a:p>
-            <a:pPr algn="ctr" indent="0" marL="0">
+            <a:pPr marL="0" indent="0" algn="ctr">
               <a:buNone/>
             </a:pPr>
             <a:r>
@@ -8648,7 +9136,7 @@
           <a:bodyPr wrap="square" rtlCol="0" anchor="ctr"/>
           <a:lstStyle/>
           <a:p>
-            <a:pPr indent="0" marL="0">
+            <a:pPr marL="0" indent="0">
               <a:buNone/>
             </a:pPr>
             <a:r>
@@ -8685,6 +9173,13 @@
           </a:solidFill>
           <a:ln/>
         </p:spPr>
+        <p:txBody>
+          <a:bodyPr/>
+          <a:lstStyle/>
+          <a:p>
+            <a:endParaRPr lang="es-PE"/>
+          </a:p>
+        </p:txBody>
       </p:sp>
       <p:sp>
         <p:nvSpPr>
@@ -8707,7 +9202,7 @@
           <a:bodyPr wrap="square" rtlCol="0" anchor="ctr"/>
           <a:lstStyle/>
           <a:p>
-            <a:pPr algn="ctr" indent="0" marL="0">
+            <a:pPr marL="0" indent="0" algn="ctr">
               <a:buNone/>
             </a:pPr>
             <a:r>
@@ -8746,7 +9241,7 @@
           <a:bodyPr wrap="square" rtlCol="0" anchor="ctr"/>
           <a:lstStyle/>
           <a:p>
-            <a:pPr indent="0" marL="0">
+            <a:pPr marL="0" indent="0">
               <a:buNone/>
             </a:pPr>
             <a:r>
@@ -8783,6 +9278,13 @@
           </a:solidFill>
           <a:ln/>
         </p:spPr>
+        <p:txBody>
+          <a:bodyPr/>
+          <a:lstStyle/>
+          <a:p>
+            <a:endParaRPr lang="es-PE"/>
+          </a:p>
+        </p:txBody>
       </p:sp>
       <p:sp>
         <p:nvSpPr>
@@ -8805,7 +9307,7 @@
           <a:bodyPr wrap="square" rtlCol="0" anchor="ctr"/>
           <a:lstStyle/>
           <a:p>
-            <a:pPr algn="ctr" indent="0" marL="0">
+            <a:pPr marL="0" indent="0" algn="ctr">
               <a:buNone/>
             </a:pPr>
             <a:r>
@@ -8844,7 +9346,7 @@
           <a:bodyPr wrap="square" rtlCol="0" anchor="ctr"/>
           <a:lstStyle/>
           <a:p>
-            <a:pPr indent="0" marL="0">
+            <a:pPr marL="0" indent="0">
               <a:buNone/>
             </a:pPr>
             <a:r>
@@ -8883,13 +9385,20 @@
           </a:solidFill>
           <a:ln/>
           <a:effectLst>
-            <a:outerShdw sx="100000" sy="100000" kx="0" ky="0" algn="bl" rotWithShape="0" blurRad="101600" dist="38100" dir="5400000">
+            <a:outerShdw blurRad="101600" dist="38100" dir="5400000" algn="bl" rotWithShape="0">
               <a:srgbClr val="000000">
                 <a:alpha val="25000"/>
               </a:srgbClr>
             </a:outerShdw>
           </a:effectLst>
         </p:spPr>
+        <p:txBody>
+          <a:bodyPr/>
+          <a:lstStyle/>
+          <a:p>
+            <a:endParaRPr lang="es-PE"/>
+          </a:p>
+        </p:txBody>
       </p:sp>
       <p:sp>
         <p:nvSpPr>
@@ -8912,11 +9421,11 @@
           <a:bodyPr wrap="square" rtlCol="0" anchor="ctr"/>
           <a:lstStyle/>
           <a:p>
-            <a:pPr indent="0" marL="0">
-              <a:buNone/>
-            </a:pPr>
-            <a:r>
-              <a:rPr lang="en-US" sz="1300" b="1" spc="150" kern="0" dirty="0">
+            <a:pPr marL="0" indent="0">
+              <a:buNone/>
+            </a:pPr>
+            <a:r>
+              <a:rPr lang="en-US" sz="1300" b="1" kern="0" spc="150" dirty="0">
                 <a:solidFill>
                   <a:srgbClr val="1C8C99"/>
                 </a:solidFill>
@@ -8951,6 +9460,13 @@
           </a:solidFill>
           <a:ln/>
         </p:spPr>
+        <p:txBody>
+          <a:bodyPr/>
+          <a:lstStyle/>
+          <a:p>
+            <a:endParaRPr lang="es-PE"/>
+          </a:p>
+        </p:txBody>
       </p:sp>
       <p:sp>
         <p:nvSpPr>
@@ -8973,7 +9489,7 @@
           <a:bodyPr wrap="square" rtlCol="0" anchor="ctr"/>
           <a:lstStyle/>
           <a:p>
-            <a:pPr indent="0" marL="0">
+            <a:pPr marL="0" indent="0">
               <a:buNone/>
             </a:pPr>
             <a:r>
@@ -9012,7 +9528,7 @@
           <a:bodyPr wrap="square" rtlCol="0" anchor="ctr"/>
           <a:lstStyle/>
           <a:p>
-            <a:pPr algn="ctr" indent="0" marL="0">
+            <a:pPr marL="0" indent="0" algn="ctr">
               <a:buNone/>
             </a:pPr>
             <a:r>
@@ -9051,6 +9567,13 @@
           </a:solidFill>
           <a:ln/>
         </p:spPr>
+        <p:txBody>
+          <a:bodyPr/>
+          <a:lstStyle/>
+          <a:p>
+            <a:endParaRPr lang="es-PE"/>
+          </a:p>
+        </p:txBody>
       </p:sp>
       <p:sp>
         <p:nvSpPr>
@@ -9073,7 +9596,7 @@
           <a:bodyPr wrap="square" rtlCol="0" anchor="ctr"/>
           <a:lstStyle/>
           <a:p>
-            <a:pPr indent="0" marL="0">
+            <a:pPr marL="0" indent="0">
               <a:buNone/>
             </a:pPr>
             <a:r>
@@ -9112,7 +9635,7 @@
           <a:bodyPr wrap="square" rtlCol="0" anchor="ctr"/>
           <a:lstStyle/>
           <a:p>
-            <a:pPr algn="ctr" indent="0" marL="0">
+            <a:pPr marL="0" indent="0" algn="ctr">
               <a:buNone/>
             </a:pPr>
             <a:r>
@@ -9151,6 +9674,13 @@
           </a:solidFill>
           <a:ln/>
         </p:spPr>
+        <p:txBody>
+          <a:bodyPr/>
+          <a:lstStyle/>
+          <a:p>
+            <a:endParaRPr lang="es-PE"/>
+          </a:p>
+        </p:txBody>
       </p:sp>
       <p:sp>
         <p:nvSpPr>
@@ -9173,7 +9703,7 @@
           <a:bodyPr wrap="square" rtlCol="0" anchor="ctr"/>
           <a:lstStyle/>
           <a:p>
-            <a:pPr indent="0" marL="0">
+            <a:pPr marL="0" indent="0">
               <a:buNone/>
             </a:pPr>
             <a:r>
@@ -9212,7 +9742,7 @@
           <a:bodyPr wrap="square" rtlCol="0" anchor="ctr"/>
           <a:lstStyle/>
           <a:p>
-            <a:pPr algn="ctr" indent="0" marL="0">
+            <a:pPr marL="0" indent="0" algn="ctr">
               <a:buNone/>
             </a:pPr>
             <a:r>
@@ -9251,6 +9781,13 @@
           </a:solidFill>
           <a:ln/>
         </p:spPr>
+        <p:txBody>
+          <a:bodyPr/>
+          <a:lstStyle/>
+          <a:p>
+            <a:endParaRPr lang="es-PE"/>
+          </a:p>
+        </p:txBody>
       </p:sp>
       <p:sp>
         <p:nvSpPr>
@@ -9273,7 +9810,7 @@
           <a:bodyPr wrap="square" rtlCol="0" anchor="ctr"/>
           <a:lstStyle/>
           <a:p>
-            <a:pPr indent="0" marL="0">
+            <a:pPr marL="0" indent="0">
               <a:buNone/>
             </a:pPr>
             <a:r>
@@ -9312,7 +9849,7 @@
           <a:bodyPr wrap="square" rtlCol="0" anchor="ctr"/>
           <a:lstStyle/>
           <a:p>
-            <a:pPr algn="ctr" indent="0" marL="0">
+            <a:pPr marL="0" indent="0" algn="ctr">
               <a:buNone/>
             </a:pPr>
             <a:r>
@@ -9351,6 +9888,13 @@
           </a:solidFill>
           <a:ln/>
         </p:spPr>
+        <p:txBody>
+          <a:bodyPr/>
+          <a:lstStyle/>
+          <a:p>
+            <a:endParaRPr lang="es-PE"/>
+          </a:p>
+        </p:txBody>
       </p:sp>
       <p:sp>
         <p:nvSpPr>
@@ -9373,7 +9917,7 @@
           <a:bodyPr wrap="square" rtlCol="0" anchor="ctr"/>
           <a:lstStyle/>
           <a:p>
-            <a:pPr indent="0" marL="0">
+            <a:pPr marL="0" indent="0">
               <a:buNone/>
             </a:pPr>
             <a:r>
@@ -9412,7 +9956,7 @@
           <a:bodyPr wrap="square" rtlCol="0" anchor="ctr"/>
           <a:lstStyle/>
           <a:p>
-            <a:pPr algn="ctr" indent="0" marL="0">
+            <a:pPr marL="0" indent="0" algn="ctr">
               <a:buNone/>
             </a:pPr>
             <a:r>
@@ -9451,6 +9995,13 @@
           </a:solidFill>
           <a:ln/>
         </p:spPr>
+        <p:txBody>
+          <a:bodyPr/>
+          <a:lstStyle/>
+          <a:p>
+            <a:endParaRPr lang="es-PE"/>
+          </a:p>
+        </p:txBody>
       </p:sp>
       <p:sp>
         <p:nvSpPr>
@@ -9473,7 +10024,7 @@
           <a:bodyPr wrap="square" rtlCol="0" anchor="ctr"/>
           <a:lstStyle/>
           <a:p>
-            <a:pPr indent="0" marL="0">
+            <a:pPr marL="0" indent="0">
               <a:buNone/>
             </a:pPr>
             <a:r>
@@ -9512,7 +10063,7 @@
           <a:bodyPr wrap="square" rtlCol="0" anchor="ctr"/>
           <a:lstStyle/>
           <a:p>
-            <a:pPr indent="0" marL="0">
+            <a:pPr marL="0" indent="0">
               <a:buNone/>
             </a:pPr>
             <a:r>
@@ -9551,7 +10102,7 @@
           <a:bodyPr wrap="square" rtlCol="0" anchor="ctr"/>
           <a:lstStyle/>
           <a:p>
-            <a:pPr algn="r" indent="0" marL="0">
+            <a:pPr marL="0" indent="0" algn="r">
               <a:buNone/>
             </a:pPr>
             <a:r>
@@ -9585,6 +10136,7 @@
         <a:solidFill>
           <a:srgbClr val="121D33"/>
         </a:solidFill>
+        <a:effectLst/>
       </p:bgPr>
     </p:bg>
     <p:spTree>
@@ -9622,11 +10174,11 @@
           <a:bodyPr wrap="square" rtlCol="0" anchor="ctr"/>
           <a:lstStyle/>
           <a:p>
-            <a:pPr indent="0" marL="0">
-              <a:buNone/>
-            </a:pPr>
-            <a:r>
-              <a:rPr lang="en-US" sz="1200" b="1" spc="200" kern="0" dirty="0">
+            <a:pPr marL="0" indent="0">
+              <a:buNone/>
+            </a:pPr>
+            <a:r>
+              <a:rPr lang="en-US" sz="1200" b="1" kern="0" spc="200" dirty="0">
                 <a:solidFill>
                   <a:srgbClr val="1C8C99"/>
                 </a:solidFill>
@@ -9661,7 +10213,7 @@
           <a:bodyPr wrap="square" rtlCol="0" anchor="ctr"/>
           <a:lstStyle/>
           <a:p>
-            <a:pPr indent="0" marL="0">
+            <a:pPr marL="0" indent="0">
               <a:buNone/>
             </a:pPr>
             <a:r>
@@ -9700,7 +10252,7 @@
           <a:bodyPr wrap="square" rtlCol="0" anchor="ctr"/>
           <a:lstStyle/>
           <a:p>
-            <a:pPr indent="0" marL="0">
+            <a:pPr marL="0" indent="0">
               <a:lnSpc>
                 <a:spcPct val="120000"/>
               </a:lnSpc>
@@ -9747,6 +10299,13 @@
             <a:prstDash val="solid"/>
           </a:ln>
         </p:spPr>
+        <p:txBody>
+          <a:bodyPr/>
+          <a:lstStyle/>
+          <a:p>
+            <a:endParaRPr lang="es-PE"/>
+          </a:p>
+        </p:txBody>
       </p:sp>
       <p:sp>
         <p:nvSpPr>
@@ -9767,6 +10326,13 @@
           </a:solidFill>
           <a:ln/>
         </p:spPr>
+        <p:txBody>
+          <a:bodyPr/>
+          <a:lstStyle/>
+          <a:p>
+            <a:endParaRPr lang="es-PE"/>
+          </a:p>
+        </p:txBody>
       </p:sp>
       <p:sp>
         <p:nvSpPr>
@@ -9789,7 +10355,7 @@
           <a:bodyPr wrap="square" rtlCol="0" anchor="ctr"/>
           <a:lstStyle/>
           <a:p>
-            <a:pPr algn="ctr" indent="0" marL="0">
+            <a:pPr marL="0" indent="0" algn="ctr">
               <a:buNone/>
             </a:pPr>
             <a:r>
@@ -9828,7 +10394,7 @@
           <a:bodyPr wrap="square" rtlCol="0" anchor="ctr"/>
           <a:lstStyle/>
           <a:p>
-            <a:pPr indent="0" marL="0">
+            <a:pPr marL="0" indent="0">
               <a:buNone/>
             </a:pPr>
             <a:r>
@@ -9867,7 +10433,7 @@
           <a:bodyPr wrap="square" rtlCol="0" anchor="t"/>
           <a:lstStyle/>
           <a:p>
-            <a:pPr indent="0" marL="0">
+            <a:pPr marL="0" indent="0">
               <a:lnSpc>
                 <a:spcPct val="120000"/>
               </a:lnSpc>
@@ -9914,6 +10480,13 @@
             <a:prstDash val="solid"/>
           </a:ln>
         </p:spPr>
+        <p:txBody>
+          <a:bodyPr/>
+          <a:lstStyle/>
+          <a:p>
+            <a:endParaRPr lang="es-PE"/>
+          </a:p>
+        </p:txBody>
       </p:sp>
       <p:sp>
         <p:nvSpPr>
@@ -9934,6 +10507,13 @@
           </a:solidFill>
           <a:ln/>
         </p:spPr>
+        <p:txBody>
+          <a:bodyPr/>
+          <a:lstStyle/>
+          <a:p>
+            <a:endParaRPr lang="es-PE"/>
+          </a:p>
+        </p:txBody>
       </p:sp>
       <p:sp>
         <p:nvSpPr>
@@ -9954,6 +10534,13 @@
           </a:solidFill>
           <a:ln/>
         </p:spPr>
+        <p:txBody>
+          <a:bodyPr/>
+          <a:lstStyle/>
+          <a:p>
+            <a:endParaRPr lang="es-PE"/>
+          </a:p>
+        </p:txBody>
       </p:sp>
       <p:sp>
         <p:nvSpPr>
@@ -9974,6 +10561,13 @@
           </a:solidFill>
           <a:ln/>
         </p:spPr>
+        <p:txBody>
+          <a:bodyPr/>
+          <a:lstStyle/>
+          <a:p>
+            <a:endParaRPr lang="es-PE"/>
+          </a:p>
+        </p:txBody>
       </p:sp>
       <p:sp>
         <p:nvSpPr>
@@ -9994,6 +10588,13 @@
           </a:solidFill>
           <a:ln/>
         </p:spPr>
+        <p:txBody>
+          <a:bodyPr/>
+          <a:lstStyle/>
+          <a:p>
+            <a:endParaRPr lang="es-PE"/>
+          </a:p>
+        </p:txBody>
       </p:sp>
       <p:sp>
         <p:nvSpPr>
@@ -10016,7 +10617,7 @@
           <a:bodyPr wrap="square" rtlCol="0" anchor="ctr"/>
           <a:lstStyle/>
           <a:p>
-            <a:pPr indent="0" marL="0">
+            <a:pPr marL="0" indent="0">
               <a:buNone/>
             </a:pPr>
             <a:r>
@@ -10055,7 +10656,7 @@
           <a:bodyPr wrap="square" rtlCol="0" anchor="t"/>
           <a:lstStyle/>
           <a:p>
-            <a:pPr indent="0" marL="0">
+            <a:pPr marL="0" indent="0">
               <a:lnSpc>
                 <a:spcPct val="120000"/>
               </a:lnSpc>
@@ -10102,6 +10703,13 @@
             <a:prstDash val="solid"/>
           </a:ln>
         </p:spPr>
+        <p:txBody>
+          <a:bodyPr/>
+          <a:lstStyle/>
+          <a:p>
+            <a:endParaRPr lang="es-PE"/>
+          </a:p>
+        </p:txBody>
       </p:sp>
       <p:sp>
         <p:nvSpPr>
@@ -10122,6 +10730,13 @@
           </a:solidFill>
           <a:ln/>
         </p:spPr>
+        <p:txBody>
+          <a:bodyPr/>
+          <a:lstStyle/>
+          <a:p>
+            <a:endParaRPr lang="es-PE"/>
+          </a:p>
+        </p:txBody>
       </p:sp>
       <p:sp>
         <p:nvSpPr>
@@ -10144,7 +10759,7 @@
           <a:bodyPr wrap="square" rtlCol="0" anchor="ctr"/>
           <a:lstStyle/>
           <a:p>
-            <a:pPr algn="ctr" indent="0" marL="0">
+            <a:pPr marL="0" indent="0" algn="ctr">
               <a:buNone/>
             </a:pPr>
             <a:r>
@@ -10183,7 +10798,7 @@
           <a:bodyPr wrap="square" rtlCol="0" anchor="ctr"/>
           <a:lstStyle/>
           <a:p>
-            <a:pPr indent="0" marL="0">
+            <a:pPr marL="0" indent="0">
               <a:buNone/>
             </a:pPr>
             <a:r>
@@ -10222,7 +10837,7 @@
           <a:bodyPr wrap="square" rtlCol="0" anchor="t"/>
           <a:lstStyle/>
           <a:p>
-            <a:pPr indent="0" marL="0">
+            <a:pPr marL="0" indent="0">
               <a:lnSpc>
                 <a:spcPct val="120000"/>
               </a:lnSpc>
@@ -10264,7 +10879,7 @@
           <a:bodyPr wrap="square" rtlCol="0" anchor="ctr"/>
           <a:lstStyle/>
           <a:p>
-            <a:pPr indent="0" marL="0">
+            <a:pPr marL="0" indent="0">
               <a:buNone/>
             </a:pPr>
             <a:r>
@@ -10303,7 +10918,7 @@
           <a:bodyPr wrap="square" rtlCol="0" anchor="ctr"/>
           <a:lstStyle/>
           <a:p>
-            <a:pPr algn="r" indent="0" marL="0">
+            <a:pPr marL="0" indent="0" algn="r">
               <a:buNone/>
             </a:pPr>
             <a:r>
@@ -10337,6 +10952,7 @@
         <a:solidFill>
           <a:srgbClr val="F4F7F9"/>
         </a:solidFill>
+        <a:effectLst/>
       </p:bgPr>
     </p:bg>
     <p:spTree>
@@ -10374,11 +10990,11 @@
           <a:bodyPr wrap="square" rtlCol="0" anchor="ctr"/>
           <a:lstStyle/>
           <a:p>
-            <a:pPr indent="0" marL="0">
-              <a:buNone/>
-            </a:pPr>
-            <a:r>
-              <a:rPr lang="en-US" sz="1200" b="1" spc="200" kern="0" dirty="0">
+            <a:pPr marL="0" indent="0">
+              <a:buNone/>
+            </a:pPr>
+            <a:r>
+              <a:rPr lang="en-US" sz="1200" b="1" kern="0" spc="200" dirty="0">
                 <a:solidFill>
                   <a:srgbClr val="1C8C99"/>
                 </a:solidFill>
@@ -10413,7 +11029,7 @@
           <a:bodyPr wrap="square" rtlCol="0" anchor="ctr"/>
           <a:lstStyle/>
           <a:p>
-            <a:pPr indent="0" marL="0">
+            <a:pPr marL="0" indent="0">
               <a:buNone/>
             </a:pPr>
             <a:r>
@@ -10452,7 +11068,7 @@
           <a:bodyPr wrap="square" rtlCol="0" anchor="ctr"/>
           <a:lstStyle/>
           <a:p>
-            <a:pPr indent="0" marL="0">
+            <a:pPr marL="0" indent="0">
               <a:buNone/>
             </a:pPr>
             <a:r>
@@ -10491,13 +11107,20 @@
           </a:solidFill>
           <a:ln/>
           <a:effectLst>
-            <a:outerShdw sx="100000" sy="100000" kx="0" ky="0" algn="bl" rotWithShape="0" blurRad="76200" dist="25400" dir="5400000">
+            <a:outerShdw blurRad="76200" dist="25400" dir="5400000" algn="bl" rotWithShape="0">
               <a:srgbClr val="1B2A4A">
                 <a:alpha val="15000"/>
               </a:srgbClr>
             </a:outerShdw>
           </a:effectLst>
         </p:spPr>
+        <p:txBody>
+          <a:bodyPr/>
+          <a:lstStyle/>
+          <a:p>
+            <a:endParaRPr lang="es-PE"/>
+          </a:p>
+        </p:txBody>
       </p:sp>
       <p:sp>
         <p:nvSpPr>
@@ -10520,6 +11143,13 @@
           </a:solidFill>
           <a:ln/>
         </p:spPr>
+        <p:txBody>
+          <a:bodyPr/>
+          <a:lstStyle/>
+          <a:p>
+            <a:endParaRPr lang="es-PE"/>
+          </a:p>
+        </p:txBody>
       </p:sp>
       <p:sp>
         <p:nvSpPr>
@@ -10542,7 +11172,7 @@
           <a:bodyPr wrap="square" rtlCol="0" anchor="t"/>
           <a:lstStyle/>
           <a:p>
-            <a:pPr indent="0" marL="0">
+            <a:pPr marL="0" indent="0">
               <a:lnSpc>
                 <a:spcPct val="125000"/>
               </a:lnSpc>
@@ -10584,7 +11214,7 @@
           <a:bodyPr wrap="square" rtlCol="0" anchor="t"/>
           <a:lstStyle/>
           <a:p>
-            <a:pPr indent="0" marL="0">
+            <a:pPr marL="0" indent="0">
               <a:lnSpc>
                 <a:spcPct val="120000"/>
               </a:lnSpc>
@@ -10626,13 +11256,20 @@
           </a:solidFill>
           <a:ln/>
           <a:effectLst>
-            <a:outerShdw sx="100000" sy="100000" kx="0" ky="0" algn="bl" rotWithShape="0" blurRad="76200" dist="25400" dir="5400000">
+            <a:outerShdw blurRad="76200" dist="25400" dir="5400000" algn="bl" rotWithShape="0">
               <a:srgbClr val="1B2A4A">
                 <a:alpha val="15000"/>
               </a:srgbClr>
             </a:outerShdw>
           </a:effectLst>
         </p:spPr>
+        <p:txBody>
+          <a:bodyPr/>
+          <a:lstStyle/>
+          <a:p>
+            <a:endParaRPr lang="es-PE"/>
+          </a:p>
+        </p:txBody>
       </p:sp>
       <p:sp>
         <p:nvSpPr>
@@ -10655,6 +11292,13 @@
           </a:solidFill>
           <a:ln/>
         </p:spPr>
+        <p:txBody>
+          <a:bodyPr/>
+          <a:lstStyle/>
+          <a:p>
+            <a:endParaRPr lang="es-PE"/>
+          </a:p>
+        </p:txBody>
       </p:sp>
       <p:sp>
         <p:nvSpPr>
@@ -10677,7 +11321,7 @@
           <a:bodyPr wrap="square" rtlCol="0" anchor="t"/>
           <a:lstStyle/>
           <a:p>
-            <a:pPr indent="0" marL="0">
+            <a:pPr marL="0" indent="0">
               <a:lnSpc>
                 <a:spcPct val="125000"/>
               </a:lnSpc>
@@ -10719,7 +11363,7 @@
           <a:bodyPr wrap="square" rtlCol="0" anchor="t"/>
           <a:lstStyle/>
           <a:p>
-            <a:pPr indent="0" marL="0">
+            <a:pPr marL="0" indent="0">
               <a:lnSpc>
                 <a:spcPct val="120000"/>
               </a:lnSpc>
@@ -10761,13 +11405,20 @@
           </a:solidFill>
           <a:ln/>
           <a:effectLst>
-            <a:outerShdw sx="100000" sy="100000" kx="0" ky="0" algn="bl" rotWithShape="0" blurRad="76200" dist="25400" dir="5400000">
+            <a:outerShdw blurRad="76200" dist="25400" dir="5400000" algn="bl" rotWithShape="0">
               <a:srgbClr val="1B2A4A">
                 <a:alpha val="15000"/>
               </a:srgbClr>
             </a:outerShdw>
           </a:effectLst>
         </p:spPr>
+        <p:txBody>
+          <a:bodyPr/>
+          <a:lstStyle/>
+          <a:p>
+            <a:endParaRPr lang="es-PE"/>
+          </a:p>
+        </p:txBody>
       </p:sp>
       <p:sp>
         <p:nvSpPr>
@@ -10790,6 +11441,13 @@
           </a:solidFill>
           <a:ln/>
         </p:spPr>
+        <p:txBody>
+          <a:bodyPr/>
+          <a:lstStyle/>
+          <a:p>
+            <a:endParaRPr lang="es-PE"/>
+          </a:p>
+        </p:txBody>
       </p:sp>
       <p:sp>
         <p:nvSpPr>
@@ -10812,7 +11470,7 @@
           <a:bodyPr wrap="square" rtlCol="0" anchor="t"/>
           <a:lstStyle/>
           <a:p>
-            <a:pPr indent="0" marL="0">
+            <a:pPr marL="0" indent="0">
               <a:lnSpc>
                 <a:spcPct val="125000"/>
               </a:lnSpc>
@@ -10854,7 +11512,7 @@
           <a:bodyPr wrap="square" rtlCol="0" anchor="t"/>
           <a:lstStyle/>
           <a:p>
-            <a:pPr indent="0" marL="0">
+            <a:pPr marL="0" indent="0">
               <a:lnSpc>
                 <a:spcPct val="120000"/>
               </a:lnSpc>
@@ -10896,13 +11554,20 @@
           </a:solidFill>
           <a:ln/>
           <a:effectLst>
-            <a:outerShdw sx="100000" sy="100000" kx="0" ky="0" algn="bl" rotWithShape="0" blurRad="76200" dist="25400" dir="5400000">
+            <a:outerShdw blurRad="76200" dist="25400" dir="5400000" algn="bl" rotWithShape="0">
               <a:srgbClr val="1B2A4A">
                 <a:alpha val="15000"/>
               </a:srgbClr>
             </a:outerShdw>
           </a:effectLst>
         </p:spPr>
+        <p:txBody>
+          <a:bodyPr/>
+          <a:lstStyle/>
+          <a:p>
+            <a:endParaRPr lang="es-PE"/>
+          </a:p>
+        </p:txBody>
       </p:sp>
       <p:sp>
         <p:nvSpPr>
@@ -10925,6 +11590,13 @@
           </a:solidFill>
           <a:ln/>
         </p:spPr>
+        <p:txBody>
+          <a:bodyPr/>
+          <a:lstStyle/>
+          <a:p>
+            <a:endParaRPr lang="es-PE"/>
+          </a:p>
+        </p:txBody>
       </p:sp>
       <p:sp>
         <p:nvSpPr>
@@ -10947,7 +11619,7 @@
           <a:bodyPr wrap="square" rtlCol="0" anchor="t"/>
           <a:lstStyle/>
           <a:p>
-            <a:pPr indent="0" marL="0">
+            <a:pPr marL="0" indent="0">
               <a:lnSpc>
                 <a:spcPct val="125000"/>
               </a:lnSpc>
@@ -10989,7 +11661,7 @@
           <a:bodyPr wrap="square" rtlCol="0" anchor="t"/>
           <a:lstStyle/>
           <a:p>
-            <a:pPr indent="0" marL="0">
+            <a:pPr marL="0" indent="0">
               <a:lnSpc>
                 <a:spcPct val="120000"/>
               </a:lnSpc>
@@ -11031,7 +11703,7 @@
           <a:bodyPr wrap="square" rtlCol="0" anchor="ctr"/>
           <a:lstStyle/>
           <a:p>
-            <a:pPr indent="0" marL="0">
+            <a:pPr marL="0" indent="0">
               <a:buNone/>
             </a:pPr>
             <a:r>
@@ -11070,7 +11742,7 @@
           <a:bodyPr wrap="square" rtlCol="0" anchor="ctr"/>
           <a:lstStyle/>
           <a:p>
-            <a:pPr indent="0" marL="0">
+            <a:pPr marL="0" indent="0">
               <a:buNone/>
             </a:pPr>
             <a:r>
@@ -11109,7 +11781,7 @@
           <a:bodyPr wrap="square" rtlCol="0" anchor="ctr"/>
           <a:lstStyle/>
           <a:p>
-            <a:pPr algn="r" indent="0" marL="0">
+            <a:pPr marL="0" indent="0" algn="r">
               <a:buNone/>
             </a:pPr>
             <a:r>
@@ -11143,6 +11815,7 @@
         <a:solidFill>
           <a:srgbClr val="FFFFFF"/>
         </a:solidFill>
+        <a:effectLst/>
       </p:bgPr>
     </p:bg>
     <p:spTree>
@@ -11180,11 +11853,11 @@
           <a:bodyPr wrap="square" rtlCol="0" anchor="ctr"/>
           <a:lstStyle/>
           <a:p>
-            <a:pPr indent="0" marL="0">
-              <a:buNone/>
-            </a:pPr>
-            <a:r>
-              <a:rPr lang="en-US" sz="1200" b="1" spc="200" kern="0" dirty="0">
+            <a:pPr marL="0" indent="0">
+              <a:buNone/>
+            </a:pPr>
+            <a:r>
+              <a:rPr lang="en-US" sz="1200" b="1" kern="0" spc="200" dirty="0">
                 <a:solidFill>
                   <a:srgbClr val="1C8C99"/>
                 </a:solidFill>
@@ -11219,7 +11892,7 @@
           <a:bodyPr wrap="square" rtlCol="0" anchor="ctr"/>
           <a:lstStyle/>
           <a:p>
-            <a:pPr indent="0" marL="0">
+            <a:pPr marL="0" indent="0">
               <a:buNone/>
             </a:pPr>
             <a:r>
@@ -11258,7 +11931,7 @@
           <a:bodyPr wrap="square" rtlCol="0" anchor="ctr"/>
           <a:lstStyle/>
           <a:p>
-            <a:pPr indent="0" marL="0">
+            <a:pPr marL="0" indent="0">
               <a:lnSpc>
                 <a:spcPct val="125000"/>
               </a:lnSpc>
@@ -11298,6 +11971,13 @@
           </a:solidFill>
           <a:ln/>
         </p:spPr>
+        <p:txBody>
+          <a:bodyPr/>
+          <a:lstStyle/>
+          <a:p>
+            <a:endParaRPr lang="es-PE"/>
+          </a:p>
+        </p:txBody>
       </p:sp>
       <p:sp>
         <p:nvSpPr>
@@ -11320,7 +12000,7 @@
           <a:bodyPr wrap="square" rtlCol="0" anchor="ctr"/>
           <a:lstStyle/>
           <a:p>
-            <a:pPr algn="ctr" indent="0" marL="0">
+            <a:pPr marL="0" indent="0" algn="ctr">
               <a:buNone/>
             </a:pPr>
             <a:r>
@@ -11359,7 +12039,7 @@
           <a:bodyPr wrap="square" rtlCol="0" anchor="ctr"/>
           <a:lstStyle/>
           <a:p>
-            <a:pPr indent="0" marL="0">
+            <a:pPr marL="0" indent="0">
               <a:buNone/>
             </a:pPr>
             <a:r>
@@ -11398,7 +12078,7 @@
           <a:bodyPr wrap="square" rtlCol="0" anchor="ctr"/>
           <a:lstStyle/>
           <a:p>
-            <a:pPr indent="0" marL="0">
+            <a:pPr marL="0" indent="0">
               <a:buNone/>
             </a:pPr>
             <a:r>
@@ -11435,6 +12115,13 @@
           </a:solidFill>
           <a:ln/>
         </p:spPr>
+        <p:txBody>
+          <a:bodyPr/>
+          <a:lstStyle/>
+          <a:p>
+            <a:endParaRPr lang="es-PE"/>
+          </a:p>
+        </p:txBody>
       </p:sp>
       <p:sp>
         <p:nvSpPr>
@@ -11457,7 +12144,7 @@
           <a:bodyPr wrap="square" rtlCol="0" anchor="ctr"/>
           <a:lstStyle/>
           <a:p>
-            <a:pPr algn="ctr" indent="0" marL="0">
+            <a:pPr marL="0" indent="0" algn="ctr">
               <a:buNone/>
             </a:pPr>
             <a:r>
@@ -11496,7 +12183,7 @@
           <a:bodyPr wrap="square" rtlCol="0" anchor="ctr"/>
           <a:lstStyle/>
           <a:p>
-            <a:pPr indent="0" marL="0">
+            <a:pPr marL="0" indent="0">
               <a:buNone/>
             </a:pPr>
             <a:r>
@@ -11535,7 +12222,7 @@
           <a:bodyPr wrap="square" rtlCol="0" anchor="ctr"/>
           <a:lstStyle/>
           <a:p>
-            <a:pPr indent="0" marL="0">
+            <a:pPr marL="0" indent="0">
               <a:buNone/>
             </a:pPr>
             <a:r>
@@ -11574,7 +12261,7 @@
           <a:bodyPr wrap="square" rtlCol="0" anchor="ctr"/>
           <a:lstStyle/>
           <a:p>
-            <a:pPr indent="0" marL="0">
+            <a:pPr marL="0" indent="0">
               <a:buNone/>
             </a:pPr>
             <a:r>
@@ -11613,6 +12300,13 @@
           </a:solidFill>
           <a:ln/>
         </p:spPr>
+        <p:txBody>
+          <a:bodyPr/>
+          <a:lstStyle/>
+          <a:p>
+            <a:endParaRPr lang="es-PE"/>
+          </a:p>
+        </p:txBody>
       </p:sp>
       <p:sp>
         <p:nvSpPr>
@@ -11635,7 +12329,7 @@
           <a:bodyPr wrap="square" rtlCol="0" anchor="t"/>
           <a:lstStyle/>
           <a:p>
-            <a:pPr indent="0" marL="0">
+            <a:pPr marL="0" indent="0">
               <a:lnSpc>
                 <a:spcPct val="115000"/>
               </a:lnSpc>
@@ -11655,7 +12349,7 @@
             <a:endParaRPr lang="en-US" sz="1150" dirty="0"/>
           </a:p>
           <a:p>
-            <a:pPr indent="0" marL="0">
+            <a:pPr marL="0" indent="0">
               <a:lnSpc>
                 <a:spcPct val="115000"/>
               </a:lnSpc>
@@ -11675,7 +12369,7 @@
             <a:endParaRPr lang="en-US" sz="1150" dirty="0"/>
           </a:p>
           <a:p>
-            <a:pPr indent="0" marL="0">
+            <a:pPr marL="0" indent="0">
               <a:lnSpc>
                 <a:spcPct val="115000"/>
               </a:lnSpc>
@@ -11684,7 +12378,7 @@
             <a:endParaRPr lang="en-US" sz="1150" dirty="0"/>
           </a:p>
           <a:p>
-            <a:pPr indent="0" marL="0">
+            <a:pPr marL="0" indent="0">
               <a:lnSpc>
                 <a:spcPct val="115000"/>
               </a:lnSpc>
@@ -11704,7 +12398,7 @@
             <a:endParaRPr lang="en-US" sz="1150" dirty="0"/>
           </a:p>
           <a:p>
-            <a:pPr indent="0" marL="0">
+            <a:pPr marL="0" indent="0">
               <a:lnSpc>
                 <a:spcPct val="115000"/>
               </a:lnSpc>
@@ -11724,7 +12418,7 @@
             <a:endParaRPr lang="en-US" sz="1150" dirty="0"/>
           </a:p>
           <a:p>
-            <a:pPr indent="0" marL="0">
+            <a:pPr marL="0" indent="0">
               <a:lnSpc>
                 <a:spcPct val="115000"/>
               </a:lnSpc>
@@ -11744,7 +12438,7 @@
             <a:endParaRPr lang="en-US" sz="1150" dirty="0"/>
           </a:p>
           <a:p>
-            <a:pPr indent="0" marL="0">
+            <a:pPr marL="0" indent="0">
               <a:lnSpc>
                 <a:spcPct val="115000"/>
               </a:lnSpc>
@@ -11764,7 +12458,7 @@
             <a:endParaRPr lang="en-US" sz="1150" dirty="0"/>
           </a:p>
           <a:p>
-            <a:pPr indent="0" marL="0">
+            <a:pPr marL="0" indent="0">
               <a:lnSpc>
                 <a:spcPct val="115000"/>
               </a:lnSpc>
@@ -11773,7 +12467,7 @@
             <a:endParaRPr lang="en-US" sz="1150" dirty="0"/>
           </a:p>
           <a:p>
-            <a:pPr indent="0" marL="0">
+            <a:pPr marL="0" indent="0">
               <a:lnSpc>
                 <a:spcPct val="115000"/>
               </a:lnSpc>
@@ -11793,7 +12487,7 @@
             <a:endParaRPr lang="en-US" sz="1150" dirty="0"/>
           </a:p>
           <a:p>
-            <a:pPr indent="0" marL="0">
+            <a:pPr marL="0" indent="0">
               <a:lnSpc>
                 <a:spcPct val="115000"/>
               </a:lnSpc>
@@ -11813,7 +12507,7 @@
             <a:endParaRPr lang="en-US" sz="1150" dirty="0"/>
           </a:p>
           <a:p>
-            <a:pPr indent="0" marL="0">
+            <a:pPr marL="0" indent="0">
               <a:lnSpc>
                 <a:spcPct val="115000"/>
               </a:lnSpc>
@@ -11833,7 +12527,7 @@
             <a:endParaRPr lang="en-US" sz="1150" dirty="0"/>
           </a:p>
           <a:p>
-            <a:pPr indent="0" marL="0">
+            <a:pPr marL="0" indent="0">
               <a:lnSpc>
                 <a:spcPct val="115000"/>
               </a:lnSpc>
@@ -11853,7 +12547,7 @@
             <a:endParaRPr lang="en-US" sz="1150" dirty="0"/>
           </a:p>
           <a:p>
-            <a:pPr indent="0" marL="0">
+            <a:pPr marL="0" indent="0">
               <a:lnSpc>
                 <a:spcPct val="115000"/>
               </a:lnSpc>
@@ -11873,7 +12567,7 @@
             <a:endParaRPr lang="en-US" sz="1150" dirty="0"/>
           </a:p>
           <a:p>
-            <a:pPr indent="0" marL="0">
+            <a:pPr marL="0" indent="0">
               <a:lnSpc>
                 <a:spcPct val="115000"/>
               </a:lnSpc>
@@ -11893,7 +12587,7 @@
             <a:endParaRPr lang="en-US" sz="1150" dirty="0"/>
           </a:p>
           <a:p>
-            <a:pPr indent="0" marL="0">
+            <a:pPr marL="0" indent="0">
               <a:lnSpc>
                 <a:spcPct val="115000"/>
               </a:lnSpc>
@@ -11913,7 +12607,7 @@
             <a:endParaRPr lang="en-US" sz="1150" dirty="0"/>
           </a:p>
           <a:p>
-            <a:pPr indent="0" marL="0">
+            <a:pPr marL="0" indent="0">
               <a:lnSpc>
                 <a:spcPct val="115000"/>
               </a:lnSpc>
@@ -11933,7 +12627,7 @@
             <a:endParaRPr lang="en-US" sz="1150" dirty="0"/>
           </a:p>
           <a:p>
-            <a:pPr indent="0" marL="0">
+            <a:pPr marL="0" indent="0">
               <a:lnSpc>
                 <a:spcPct val="115000"/>
               </a:lnSpc>
@@ -11953,7 +12647,7 @@
             <a:endParaRPr lang="en-US" sz="1150" dirty="0"/>
           </a:p>
           <a:p>
-            <a:pPr indent="0" marL="0">
+            <a:pPr marL="0" indent="0">
               <a:lnSpc>
                 <a:spcPct val="115000"/>
               </a:lnSpc>
@@ -11973,7 +12667,7 @@
             <a:endParaRPr lang="en-US" sz="1150" dirty="0"/>
           </a:p>
           <a:p>
-            <a:pPr indent="0" marL="0">
+            <a:pPr marL="0" indent="0">
               <a:lnSpc>
                 <a:spcPct val="115000"/>
               </a:lnSpc>
@@ -12015,7 +12709,7 @@
           <a:bodyPr wrap="square" rtlCol="0" anchor="ctr"/>
           <a:lstStyle/>
           <a:p>
-            <a:pPr indent="0" marL="0">
+            <a:pPr marL="0" indent="0">
               <a:buNone/>
             </a:pPr>
             <a:r>
@@ -12054,7 +12748,7 @@
           <a:bodyPr wrap="square" rtlCol="0" anchor="ctr"/>
           <a:lstStyle/>
           <a:p>
-            <a:pPr algn="r" indent="0" marL="0">
+            <a:pPr marL="0" indent="0" algn="r">
               <a:buNone/>
             </a:pPr>
             <a:r>
@@ -12088,6 +12782,7 @@
         <a:solidFill>
           <a:srgbClr val="F4F7F9"/>
         </a:solidFill>
+        <a:effectLst/>
       </p:bgPr>
     </p:bg>
     <p:spTree>
@@ -12125,11 +12820,11 @@
           <a:bodyPr wrap="square" rtlCol="0" anchor="ctr"/>
           <a:lstStyle/>
           <a:p>
-            <a:pPr indent="0" marL="0">
-              <a:buNone/>
-            </a:pPr>
-            <a:r>
-              <a:rPr lang="en-US" sz="1200" b="1" spc="200" kern="0" dirty="0">
+            <a:pPr marL="0" indent="0">
+              <a:buNone/>
+            </a:pPr>
+            <a:r>
+              <a:rPr lang="en-US" sz="1200" b="1" kern="0" spc="200" dirty="0">
                 <a:solidFill>
                   <a:srgbClr val="1C8C99"/>
                 </a:solidFill>
@@ -12164,7 +12859,7 @@
           <a:bodyPr wrap="square" rtlCol="0" anchor="ctr"/>
           <a:lstStyle/>
           <a:p>
-            <a:pPr indent="0" marL="0">
+            <a:pPr marL="0" indent="0">
               <a:buNone/>
             </a:pPr>
             <a:r>
@@ -12203,13 +12898,20 @@
           </a:solidFill>
           <a:ln/>
           <a:effectLst>
-            <a:outerShdw sx="100000" sy="100000" kx="0" ky="0" algn="bl" rotWithShape="0" blurRad="76200" dist="25400" dir="5400000">
+            <a:outerShdw blurRad="76200" dist="25400" dir="5400000" algn="bl" rotWithShape="0">
               <a:srgbClr val="1B2A4A">
                 <a:alpha val="12000"/>
               </a:srgbClr>
             </a:outerShdw>
           </a:effectLst>
         </p:spPr>
+        <p:txBody>
+          <a:bodyPr/>
+          <a:lstStyle/>
+          <a:p>
+            <a:endParaRPr lang="es-PE"/>
+          </a:p>
+        </p:txBody>
       </p:sp>
       <p:sp>
         <p:nvSpPr>
@@ -12230,6 +12932,13 @@
           </a:solidFill>
           <a:ln/>
         </p:spPr>
+        <p:txBody>
+          <a:bodyPr/>
+          <a:lstStyle/>
+          <a:p>
+            <a:endParaRPr lang="es-PE"/>
+          </a:p>
+        </p:txBody>
       </p:sp>
       <p:sp>
         <p:nvSpPr>
@@ -12252,7 +12961,7 @@
           <a:bodyPr wrap="square" rtlCol="0" anchor="ctr"/>
           <a:lstStyle/>
           <a:p>
-            <a:pPr algn="ctr" indent="0" marL="0">
+            <a:pPr marL="0" indent="0" algn="ctr">
               <a:buNone/>
             </a:pPr>
             <a:r>
@@ -12291,7 +13000,7 @@
           <a:bodyPr wrap="square" rtlCol="0" anchor="ctr"/>
           <a:lstStyle/>
           <a:p>
-            <a:pPr indent="0" marL="0">
+            <a:pPr marL="0" indent="0">
               <a:buNone/>
             </a:pPr>
             <a:r>
@@ -12330,7 +13039,7 @@
           <a:bodyPr wrap="square" rtlCol="0" anchor="ctr"/>
           <a:lstStyle/>
           <a:p>
-            <a:pPr indent="0" marL="0">
+            <a:pPr marL="0" indent="0">
               <a:lnSpc>
                 <a:spcPct val="120000"/>
               </a:lnSpc>
@@ -12372,7 +13081,7 @@
           <a:bodyPr wrap="square" rtlCol="0" anchor="ctr"/>
           <a:lstStyle/>
           <a:p>
-            <a:pPr indent="0" marL="0">
+            <a:pPr marL="0" indent="0">
               <a:buNone/>
             </a:pPr>
             <a:r>
@@ -12411,6 +13120,13 @@
           </a:solidFill>
           <a:ln/>
         </p:spPr>
+        <p:txBody>
+          <a:bodyPr/>
+          <a:lstStyle/>
+          <a:p>
+            <a:endParaRPr lang="es-PE"/>
+          </a:p>
+        </p:txBody>
       </p:sp>
       <p:sp>
         <p:nvSpPr>
@@ -12433,7 +13149,7 @@
           <a:bodyPr wrap="square" rtlCol="0" anchor="ctr"/>
           <a:lstStyle/>
           <a:p>
-            <a:pPr indent="0" marL="0">
+            <a:pPr marL="0" indent="0">
               <a:buNone/>
             </a:pPr>
             <a:r>
@@ -12472,7 +13188,7 @@
           <a:bodyPr wrap="square" rtlCol="0" anchor="ctr"/>
           <a:lstStyle/>
           <a:p>
-            <a:pPr indent="0" marL="0">
+            <a:pPr marL="0" indent="0">
               <a:buNone/>
             </a:pPr>
             <a:r>
@@ -12511,6 +13227,13 @@
           </a:solidFill>
           <a:ln/>
         </p:spPr>
+        <p:txBody>
+          <a:bodyPr/>
+          <a:lstStyle/>
+          <a:p>
+            <a:endParaRPr lang="es-PE"/>
+          </a:p>
+        </p:txBody>
       </p:sp>
       <p:sp>
         <p:nvSpPr>
@@ -12533,7 +13256,7 @@
           <a:bodyPr wrap="square" rtlCol="0" anchor="ctr"/>
           <a:lstStyle/>
           <a:p>
-            <a:pPr indent="0" marL="0">
+            <a:pPr marL="0" indent="0">
               <a:buNone/>
             </a:pPr>
             <a:r>
@@ -12572,7 +13295,7 @@
           <a:bodyPr wrap="square" rtlCol="0" anchor="ctr"/>
           <a:lstStyle/>
           <a:p>
-            <a:pPr indent="0" marL="0">
+            <a:pPr marL="0" indent="0">
               <a:buNone/>
             </a:pPr>
             <a:r>
@@ -12611,6 +13334,13 @@
           </a:solidFill>
           <a:ln/>
         </p:spPr>
+        <p:txBody>
+          <a:bodyPr/>
+          <a:lstStyle/>
+          <a:p>
+            <a:endParaRPr lang="es-PE"/>
+          </a:p>
+        </p:txBody>
       </p:sp>
       <p:sp>
         <p:nvSpPr>
@@ -12633,7 +13363,7 @@
           <a:bodyPr wrap="square" rtlCol="0" anchor="ctr"/>
           <a:lstStyle/>
           <a:p>
-            <a:pPr indent="0" marL="0">
+            <a:pPr marL="0" indent="0">
               <a:buNone/>
             </a:pPr>
             <a:r>
@@ -12672,7 +13402,7 @@
           <a:bodyPr wrap="square" rtlCol="0" anchor="ctr"/>
           <a:lstStyle/>
           <a:p>
-            <a:pPr indent="0" marL="0">
+            <a:pPr marL="0" indent="0">
               <a:buNone/>
             </a:pPr>
             <a:r>
@@ -12711,6 +13441,13 @@
           </a:solidFill>
           <a:ln/>
         </p:spPr>
+        <p:txBody>
+          <a:bodyPr/>
+          <a:lstStyle/>
+          <a:p>
+            <a:endParaRPr lang="es-PE"/>
+          </a:p>
+        </p:txBody>
       </p:sp>
       <p:sp>
         <p:nvSpPr>
@@ -12731,6 +13468,13 @@
           </a:solidFill>
           <a:ln/>
         </p:spPr>
+        <p:txBody>
+          <a:bodyPr/>
+          <a:lstStyle/>
+          <a:p>
+            <a:endParaRPr lang="es-PE"/>
+          </a:p>
+        </p:txBody>
       </p:sp>
       <p:sp>
         <p:nvSpPr>
@@ -12753,7 +13497,7 @@
           <a:bodyPr wrap="square" rtlCol="0" anchor="ctr"/>
           <a:lstStyle/>
           <a:p>
-            <a:pPr algn="ctr" indent="0" marL="0">
+            <a:pPr marL="0" indent="0" algn="ctr">
               <a:buNone/>
             </a:pPr>
             <a:r>
@@ -12792,7 +13536,7 @@
           <a:bodyPr wrap="square" rtlCol="0" anchor="ctr"/>
           <a:lstStyle/>
           <a:p>
-            <a:pPr indent="0" marL="0">
+            <a:pPr marL="0" indent="0">
               <a:buNone/>
             </a:pPr>
             <a:r>
@@ -12831,7 +13575,7 @@
           <a:bodyPr wrap="square" rtlCol="0" anchor="ctr"/>
           <a:lstStyle/>
           <a:p>
-            <a:pPr indent="0" marL="0">
+            <a:pPr marL="0" indent="0">
               <a:lnSpc>
                 <a:spcPct val="120000"/>
               </a:lnSpc>
@@ -12873,6 +13617,13 @@
           </a:solidFill>
           <a:ln/>
         </p:spPr>
+        <p:txBody>
+          <a:bodyPr/>
+          <a:lstStyle/>
+          <a:p>
+            <a:endParaRPr lang="es-PE"/>
+          </a:p>
+        </p:txBody>
       </p:sp>
       <p:sp>
         <p:nvSpPr>
@@ -12895,7 +13646,7 @@
           <a:bodyPr wrap="square" rtlCol="0" anchor="t"/>
           <a:lstStyle/>
           <a:p>
-            <a:pPr indent="0" marL="0">
+            <a:pPr marL="0" indent="0">
               <a:lnSpc>
                 <a:spcPct val="125000"/>
               </a:lnSpc>
@@ -12915,7 +13666,7 @@
             <a:endParaRPr lang="en-US" sz="1050" dirty="0"/>
           </a:p>
           <a:p>
-            <a:pPr indent="0" marL="0">
+            <a:pPr marL="0" indent="0">
               <a:lnSpc>
                 <a:spcPct val="125000"/>
               </a:lnSpc>
@@ -12935,7 +13686,7 @@
             <a:endParaRPr lang="en-US" sz="1050" dirty="0"/>
           </a:p>
           <a:p>
-            <a:pPr indent="0" marL="0">
+            <a:pPr marL="0" indent="0">
               <a:lnSpc>
                 <a:spcPct val="125000"/>
               </a:lnSpc>
@@ -12955,7 +13706,7 @@
             <a:endParaRPr lang="en-US" sz="1050" dirty="0"/>
           </a:p>
           <a:p>
-            <a:pPr indent="0" marL="0">
+            <a:pPr marL="0" indent="0">
               <a:lnSpc>
                 <a:spcPct val="125000"/>
               </a:lnSpc>
@@ -12997,7 +13748,7 @@
           <a:bodyPr wrap="square" rtlCol="0" anchor="t"/>
           <a:lstStyle/>
           <a:p>
-            <a:pPr indent="0" marL="0">
+            <a:pPr marL="0" indent="0">
               <a:buNone/>
             </a:pPr>
             <a:r>
@@ -13036,7 +13787,7 @@
           <a:bodyPr wrap="square" rtlCol="0" anchor="ctr"/>
           <a:lstStyle/>
           <a:p>
-            <a:pPr indent="0" marL="0">
+            <a:pPr marL="0" indent="0">
               <a:buNone/>
             </a:pPr>
             <a:r>
@@ -13075,7 +13826,7 @@
           <a:bodyPr wrap="square" rtlCol="0" anchor="ctr"/>
           <a:lstStyle/>
           <a:p>
-            <a:pPr algn="r" indent="0" marL="0">
+            <a:pPr marL="0" indent="0" algn="r">
               <a:buNone/>
             </a:pPr>
             <a:r>
@@ -13109,6 +13860,7 @@
         <a:solidFill>
           <a:srgbClr val="F4F7F9"/>
         </a:solidFill>
+        <a:effectLst/>
       </p:bgPr>
     </p:bg>
     <p:spTree>
@@ -13146,11 +13898,11 @@
           <a:bodyPr wrap="square" rtlCol="0" anchor="ctr"/>
           <a:lstStyle/>
           <a:p>
-            <a:pPr indent="0" marL="0">
-              <a:buNone/>
-            </a:pPr>
-            <a:r>
-              <a:rPr lang="en-US" sz="1200" b="1" spc="200" kern="0" dirty="0">
+            <a:pPr marL="0" indent="0">
+              <a:buNone/>
+            </a:pPr>
+            <a:r>
+              <a:rPr lang="en-US" sz="1200" b="1" kern="0" spc="200" dirty="0">
                 <a:solidFill>
                   <a:srgbClr val="1C8C99"/>
                 </a:solidFill>
@@ -13185,7 +13937,7 @@
           <a:bodyPr wrap="square" rtlCol="0" anchor="ctr"/>
           <a:lstStyle/>
           <a:p>
-            <a:pPr indent="0" marL="0">
+            <a:pPr marL="0" indent="0">
               <a:buNone/>
             </a:pPr>
             <a:r>
@@ -13224,13 +13976,20 @@
           </a:solidFill>
           <a:ln/>
           <a:effectLst>
-            <a:outerShdw sx="100000" sy="100000" kx="0" ky="0" algn="bl" rotWithShape="0" blurRad="76200" dist="25400" dir="5400000">
+            <a:outerShdw blurRad="76200" dist="25400" dir="5400000" algn="bl" rotWithShape="0">
               <a:srgbClr val="1B2A4A">
                 <a:alpha val="12000"/>
               </a:srgbClr>
             </a:outerShdw>
           </a:effectLst>
         </p:spPr>
+        <p:txBody>
+          <a:bodyPr/>
+          <a:lstStyle/>
+          <a:p>
+            <a:endParaRPr lang="es-PE"/>
+          </a:p>
+        </p:txBody>
       </p:sp>
       <p:sp>
         <p:nvSpPr>
@@ -13251,6 +14010,13 @@
           </a:solidFill>
           <a:ln/>
         </p:spPr>
+        <p:txBody>
+          <a:bodyPr/>
+          <a:lstStyle/>
+          <a:p>
+            <a:endParaRPr lang="es-PE"/>
+          </a:p>
+        </p:txBody>
       </p:sp>
       <p:sp>
         <p:nvSpPr>
@@ -13273,7 +14039,7 @@
           <a:bodyPr wrap="square" rtlCol="0" anchor="ctr"/>
           <a:lstStyle/>
           <a:p>
-            <a:pPr algn="ctr" indent="0" marL="0">
+            <a:pPr marL="0" indent="0" algn="ctr">
               <a:buNone/>
             </a:pPr>
             <a:r>
@@ -13312,7 +14078,7 @@
           <a:bodyPr wrap="square" rtlCol="0" anchor="ctr"/>
           <a:lstStyle/>
           <a:p>
-            <a:pPr indent="0" marL="0">
+            <a:pPr marL="0" indent="0">
               <a:buNone/>
             </a:pPr>
             <a:r>
@@ -13351,7 +14117,7 @@
           <a:bodyPr wrap="square" rtlCol="0" anchor="ctr"/>
           <a:lstStyle/>
           <a:p>
-            <a:pPr indent="0" marL="0">
+            <a:pPr marL="0" indent="0">
               <a:lnSpc>
                 <a:spcPct val="120000"/>
               </a:lnSpc>
@@ -13393,7 +14159,7 @@
           <a:bodyPr wrap="square" rtlCol="0" anchor="ctr"/>
           <a:lstStyle/>
           <a:p>
-            <a:pPr indent="0" marL="0">
+            <a:pPr marL="0" indent="0">
               <a:buNone/>
             </a:pPr>
             <a:r>
@@ -13432,6 +14198,13 @@
           </a:solidFill>
           <a:ln/>
         </p:spPr>
+        <p:txBody>
+          <a:bodyPr/>
+          <a:lstStyle/>
+          <a:p>
+            <a:endParaRPr lang="es-PE"/>
+          </a:p>
+        </p:txBody>
       </p:sp>
       <p:sp>
         <p:nvSpPr>
@@ -13454,7 +14227,7 @@
           <a:bodyPr wrap="square" rtlCol="0" anchor="ctr"/>
           <a:lstStyle/>
           <a:p>
-            <a:pPr indent="0" marL="0">
+            <a:pPr marL="0" indent="0">
               <a:buNone/>
             </a:pPr>
             <a:r>
@@ -13493,7 +14266,7 @@
           <a:bodyPr wrap="square" rtlCol="0" anchor="ctr"/>
           <a:lstStyle/>
           <a:p>
-            <a:pPr indent="0" marL="0">
+            <a:pPr marL="0" indent="0">
               <a:buNone/>
             </a:pPr>
             <a:r>
@@ -13532,7 +14305,7 @@
           <a:bodyPr wrap="square" rtlCol="0" anchor="ctr"/>
           <a:lstStyle/>
           <a:p>
-            <a:pPr indent="0" marL="0">
+            <a:pPr marL="0" indent="0">
               <a:lnSpc>
                 <a:spcPct val="130000"/>
               </a:lnSpc>
@@ -13574,7 +14347,7 @@
           <a:bodyPr wrap="square" rtlCol="0" anchor="t"/>
           <a:lstStyle/>
           <a:p>
-            <a:pPr indent="0" marL="0">
+            <a:pPr marL="0" indent="0">
               <a:buNone/>
             </a:pPr>
             <a:r>
@@ -13613,6 +14386,13 @@
           </a:solidFill>
           <a:ln/>
         </p:spPr>
+        <p:txBody>
+          <a:bodyPr/>
+          <a:lstStyle/>
+          <a:p>
+            <a:endParaRPr lang="es-PE"/>
+          </a:p>
+        </p:txBody>
       </p:sp>
       <p:sp>
         <p:nvSpPr>
@@ -13633,6 +14413,13 @@
           </a:solidFill>
           <a:ln/>
         </p:spPr>
+        <p:txBody>
+          <a:bodyPr/>
+          <a:lstStyle/>
+          <a:p>
+            <a:endParaRPr lang="es-PE"/>
+          </a:p>
+        </p:txBody>
       </p:sp>
       <p:sp>
         <p:nvSpPr>
@@ -13655,7 +14442,7 @@
           <a:bodyPr wrap="square" rtlCol="0" anchor="ctr"/>
           <a:lstStyle/>
           <a:p>
-            <a:pPr algn="ctr" indent="0" marL="0">
+            <a:pPr marL="0" indent="0" algn="ctr">
               <a:buNone/>
             </a:pPr>
             <a:r>
@@ -13694,7 +14481,7 @@
           <a:bodyPr wrap="square" rtlCol="0" anchor="ctr"/>
           <a:lstStyle/>
           <a:p>
-            <a:pPr indent="0" marL="0">
+            <a:pPr marL="0" indent="0">
               <a:buNone/>
             </a:pPr>
             <a:r>
@@ -13733,7 +14520,7 @@
           <a:bodyPr wrap="square" rtlCol="0" anchor="ctr"/>
           <a:lstStyle/>
           <a:p>
-            <a:pPr indent="0" marL="0">
+            <a:pPr marL="0" indent="0">
               <a:lnSpc>
                 <a:spcPct val="120000"/>
               </a:lnSpc>
@@ -13775,6 +14562,13 @@
           </a:solidFill>
           <a:ln/>
         </p:spPr>
+        <p:txBody>
+          <a:bodyPr/>
+          <a:lstStyle/>
+          <a:p>
+            <a:endParaRPr lang="es-PE"/>
+          </a:p>
+        </p:txBody>
       </p:sp>
       <p:sp>
         <p:nvSpPr>
@@ -13797,7 +14591,7 @@
           <a:bodyPr wrap="square" rtlCol="0" anchor="ctr"/>
           <a:lstStyle/>
           <a:p>
-            <a:pPr indent="0" marL="0">
+            <a:pPr marL="0" indent="0">
               <a:buNone/>
             </a:pPr>
             <a:r>
@@ -13836,7 +14630,7 @@
           <a:bodyPr wrap="square" rtlCol="0" anchor="ctr"/>
           <a:lstStyle/>
           <a:p>
-            <a:pPr indent="0" marL="0">
+            <a:pPr marL="0" indent="0">
               <a:lnSpc>
                 <a:spcPct val="120000"/>
               </a:lnSpc>
@@ -13878,7 +14672,7 @@
           <a:bodyPr wrap="square" rtlCol="0" anchor="t"/>
           <a:lstStyle/>
           <a:p>
-            <a:pPr indent="0" marL="0">
+            <a:pPr marL="0" indent="0">
               <a:buNone/>
             </a:pPr>
             <a:r>
@@ -13917,7 +14711,7 @@
           <a:bodyPr wrap="square" rtlCol="0" anchor="ctr"/>
           <a:lstStyle/>
           <a:p>
-            <a:pPr indent="0" marL="0">
+            <a:pPr marL="0" indent="0">
               <a:buNone/>
             </a:pPr>
             <a:r>
@@ -13956,7 +14750,7 @@
           <a:bodyPr wrap="square" rtlCol="0" anchor="ctr"/>
           <a:lstStyle/>
           <a:p>
-            <a:pPr algn="r" indent="0" marL="0">
+            <a:pPr marL="0" indent="0" algn="r">
               <a:buNone/>
             </a:pPr>
             <a:r>
@@ -13990,6 +14784,7 @@
         <a:solidFill>
           <a:srgbClr val="FFFFFF"/>
         </a:solidFill>
+        <a:effectLst/>
       </p:bgPr>
     </p:bg>
     <p:spTree>
@@ -14027,11 +14822,11 @@
           <a:bodyPr wrap="square" rtlCol="0" anchor="ctr"/>
           <a:lstStyle/>
           <a:p>
-            <a:pPr indent="0" marL="0">
-              <a:buNone/>
-            </a:pPr>
-            <a:r>
-              <a:rPr lang="en-US" sz="1200" b="1" spc="200" kern="0" dirty="0">
+            <a:pPr marL="0" indent="0">
+              <a:buNone/>
+            </a:pPr>
+            <a:r>
+              <a:rPr lang="en-US" sz="1200" b="1" kern="0" spc="200" dirty="0">
                 <a:solidFill>
                   <a:srgbClr val="1C8C99"/>
                 </a:solidFill>
@@ -14066,7 +14861,7 @@
           <a:bodyPr wrap="square" rtlCol="0" anchor="ctr"/>
           <a:lstStyle/>
           <a:p>
-            <a:pPr indent="0" marL="0">
+            <a:pPr marL="0" indent="0">
               <a:buNone/>
             </a:pPr>
             <a:r>
@@ -14105,7 +14900,7 @@
           <a:bodyPr wrap="square" rtlCol="0" anchor="ctr"/>
           <a:lstStyle/>
           <a:p>
-            <a:pPr indent="0" marL="0">
+            <a:pPr marL="0" indent="0">
               <a:lnSpc>
                 <a:spcPct val="125000"/>
               </a:lnSpc>
@@ -14145,6 +14940,13 @@
           </a:solidFill>
           <a:ln/>
         </p:spPr>
+        <p:txBody>
+          <a:bodyPr/>
+          <a:lstStyle/>
+          <a:p>
+            <a:endParaRPr lang="es-PE"/>
+          </a:p>
+        </p:txBody>
       </p:sp>
       <p:sp>
         <p:nvSpPr>
@@ -14167,7 +14969,7 @@
           <a:bodyPr wrap="square" rtlCol="0" anchor="ctr"/>
           <a:lstStyle/>
           <a:p>
-            <a:pPr algn="ctr" indent="0" marL="0">
+            <a:pPr marL="0" indent="0" algn="ctr">
               <a:buNone/>
             </a:pPr>
             <a:r>
@@ -14206,7 +15008,7 @@
           <a:bodyPr wrap="square" rtlCol="0" anchor="ctr"/>
           <a:lstStyle/>
           <a:p>
-            <a:pPr indent="0" marL="0">
+            <a:pPr marL="0" indent="0">
               <a:buNone/>
             </a:pPr>
             <a:r>
@@ -14243,6 +15045,13 @@
           </a:solidFill>
           <a:ln/>
         </p:spPr>
+        <p:txBody>
+          <a:bodyPr/>
+          <a:lstStyle/>
+          <a:p>
+            <a:endParaRPr lang="es-PE"/>
+          </a:p>
+        </p:txBody>
       </p:sp>
       <p:sp>
         <p:nvSpPr>
@@ -14265,7 +15074,7 @@
           <a:bodyPr wrap="square" rtlCol="0" anchor="ctr"/>
           <a:lstStyle/>
           <a:p>
-            <a:pPr algn="ctr" indent="0" marL="0">
+            <a:pPr marL="0" indent="0" algn="ctr">
               <a:buNone/>
             </a:pPr>
             <a:r>
@@ -14304,7 +15113,7 @@
           <a:bodyPr wrap="square" rtlCol="0" anchor="ctr"/>
           <a:lstStyle/>
           <a:p>
-            <a:pPr indent="0" marL="0">
+            <a:pPr marL="0" indent="0">
               <a:buNone/>
             </a:pPr>
             <a:r>
@@ -14341,6 +15150,13 @@
           </a:solidFill>
           <a:ln/>
         </p:spPr>
+        <p:txBody>
+          <a:bodyPr/>
+          <a:lstStyle/>
+          <a:p>
+            <a:endParaRPr lang="es-PE"/>
+          </a:p>
+        </p:txBody>
       </p:sp>
       <p:sp>
         <p:nvSpPr>
@@ -14363,7 +15179,7 @@
           <a:bodyPr wrap="square" rtlCol="0" anchor="ctr"/>
           <a:lstStyle/>
           <a:p>
-            <a:pPr algn="ctr" indent="0" marL="0">
+            <a:pPr marL="0" indent="0" algn="ctr">
               <a:buNone/>
             </a:pPr>
             <a:r>
@@ -14402,7 +15218,7 @@
           <a:bodyPr wrap="square" rtlCol="0" anchor="ctr"/>
           <a:lstStyle/>
           <a:p>
-            <a:pPr indent="0" marL="0">
+            <a:pPr marL="0" indent="0">
               <a:buNone/>
             </a:pPr>
             <a:r>
@@ -14439,6 +15255,13 @@
           </a:solidFill>
           <a:ln/>
         </p:spPr>
+        <p:txBody>
+          <a:bodyPr/>
+          <a:lstStyle/>
+          <a:p>
+            <a:endParaRPr lang="es-PE"/>
+          </a:p>
+        </p:txBody>
       </p:sp>
       <p:sp>
         <p:nvSpPr>
@@ -14461,7 +15284,7 @@
           <a:bodyPr wrap="square" rtlCol="0" anchor="ctr"/>
           <a:lstStyle/>
           <a:p>
-            <a:pPr algn="ctr" indent="0" marL="0">
+            <a:pPr marL="0" indent="0" algn="ctr">
               <a:buNone/>
             </a:pPr>
             <a:r>
@@ -14500,7 +15323,7 @@
           <a:bodyPr wrap="square" rtlCol="0" anchor="ctr"/>
           <a:lstStyle/>
           <a:p>
-            <a:pPr indent="0" marL="0">
+            <a:pPr marL="0" indent="0">
               <a:buNone/>
             </a:pPr>
             <a:r>
@@ -14544,6 +15367,13 @@
             <a:prstDash val="solid"/>
           </a:ln>
         </p:spPr>
+        <p:txBody>
+          <a:bodyPr/>
+          <a:lstStyle/>
+          <a:p>
+            <a:endParaRPr lang="es-PE"/>
+          </a:p>
+        </p:txBody>
       </p:sp>
       <p:sp>
         <p:nvSpPr>
@@ -14566,6 +15396,13 @@
           </a:solidFill>
           <a:ln/>
         </p:spPr>
+        <p:txBody>
+          <a:bodyPr/>
+          <a:lstStyle/>
+          <a:p>
+            <a:endParaRPr lang="es-PE"/>
+          </a:p>
+        </p:txBody>
       </p:sp>
       <p:sp>
         <p:nvSpPr>
@@ -14588,7 +15425,7 @@
           <a:bodyPr wrap="square" rtlCol="0" anchor="ctr"/>
           <a:lstStyle/>
           <a:p>
-            <a:pPr indent="0" marL="0">
+            <a:pPr marL="0" indent="0">
               <a:buNone/>
             </a:pPr>
             <a:r>
@@ -14627,7 +15464,7 @@
           <a:bodyPr wrap="square" rtlCol="0" anchor="ctr"/>
           <a:lstStyle/>
           <a:p>
-            <a:pPr algn="ctr" indent="0" marL="0">
+            <a:pPr marL="0" indent="0" algn="ctr">
               <a:buNone/>
             </a:pPr>
             <a:r>
@@ -14666,6 +15503,13 @@
           </a:solidFill>
           <a:ln/>
         </p:spPr>
+        <p:txBody>
+          <a:bodyPr/>
+          <a:lstStyle/>
+          <a:p>
+            <a:endParaRPr lang="es-PE"/>
+          </a:p>
+        </p:txBody>
       </p:sp>
       <p:sp>
         <p:nvSpPr>
@@ -14688,7 +15532,7 @@
           <a:bodyPr wrap="square" rtlCol="0" anchor="ctr"/>
           <a:lstStyle/>
           <a:p>
-            <a:pPr indent="0" marL="0">
+            <a:pPr marL="0" indent="0">
               <a:buNone/>
             </a:pPr>
             <a:r>
@@ -14727,7 +15571,7 @@
           <a:bodyPr wrap="square" rtlCol="0" anchor="ctr"/>
           <a:lstStyle/>
           <a:p>
-            <a:pPr algn="ctr" indent="0" marL="0">
+            <a:pPr marL="0" indent="0" algn="ctr">
               <a:buNone/>
             </a:pPr>
             <a:r>
@@ -14766,13 +15610,20 @@
           </a:solidFill>
           <a:ln/>
           <a:effectLst>
-            <a:outerShdw sx="100000" sy="100000" kx="0" ky="0" algn="bl" rotWithShape="0" blurRad="63500" dist="25400" dir="5400000">
+            <a:outerShdw blurRad="63500" dist="25400" dir="5400000" algn="bl" rotWithShape="0">
               <a:srgbClr val="116670">
                 <a:alpha val="30000"/>
               </a:srgbClr>
             </a:outerShdw>
           </a:effectLst>
         </p:spPr>
+        <p:txBody>
+          <a:bodyPr/>
+          <a:lstStyle/>
+          <a:p>
+            <a:endParaRPr lang="es-PE"/>
+          </a:p>
+        </p:txBody>
       </p:sp>
       <p:sp>
         <p:nvSpPr>
@@ -14795,7 +15646,7 @@
           <a:bodyPr wrap="square" rtlCol="0" anchor="ctr"/>
           <a:lstStyle/>
           <a:p>
-            <a:pPr indent="0" marL="0">
+            <a:pPr marL="0" indent="0">
               <a:buNone/>
             </a:pPr>
             <a:r>
@@ -14834,7 +15685,7 @@
           <a:bodyPr wrap="square" rtlCol="0" anchor="ctr"/>
           <a:lstStyle/>
           <a:p>
-            <a:pPr algn="ctr" indent="0" marL="0">
+            <a:pPr marL="0" indent="0" algn="ctr">
               <a:buNone/>
             </a:pPr>
             <a:r>
@@ -14873,6 +15724,13 @@
           </a:solidFill>
           <a:ln/>
         </p:spPr>
+        <p:txBody>
+          <a:bodyPr/>
+          <a:lstStyle/>
+          <a:p>
+            <a:endParaRPr lang="es-PE"/>
+          </a:p>
+        </p:txBody>
       </p:sp>
       <p:sp>
         <p:nvSpPr>
@@ -14895,7 +15753,7 @@
           <a:bodyPr wrap="square" rtlCol="0" anchor="ctr"/>
           <a:lstStyle/>
           <a:p>
-            <a:pPr indent="0" marL="0">
+            <a:pPr marL="0" indent="0">
               <a:buNone/>
             </a:pPr>
             <a:r>
@@ -14934,7 +15792,7 @@
           <a:bodyPr wrap="square" rtlCol="0" anchor="ctr"/>
           <a:lstStyle/>
           <a:p>
-            <a:pPr algn="ctr" indent="0" marL="0">
+            <a:pPr marL="0" indent="0" algn="ctr">
               <a:buNone/>
             </a:pPr>
             <a:r>
@@ -14973,6 +15831,13 @@
           </a:solidFill>
           <a:ln/>
         </p:spPr>
+        <p:txBody>
+          <a:bodyPr/>
+          <a:lstStyle/>
+          <a:p>
+            <a:endParaRPr lang="es-PE"/>
+          </a:p>
+        </p:txBody>
       </p:sp>
       <p:sp>
         <p:nvSpPr>
@@ -14995,7 +15860,7 @@
           <a:bodyPr wrap="square" rtlCol="0" anchor="ctr"/>
           <a:lstStyle/>
           <a:p>
-            <a:pPr indent="0" marL="0">
+            <a:pPr marL="0" indent="0">
               <a:buNone/>
             </a:pPr>
             <a:r>
@@ -15034,7 +15899,7 @@
           <a:bodyPr wrap="square" rtlCol="0" anchor="ctr"/>
           <a:lstStyle/>
           <a:p>
-            <a:pPr algn="ctr" indent="0" marL="0">
+            <a:pPr marL="0" indent="0" algn="ctr">
               <a:buNone/>
             </a:pPr>
             <a:r>
@@ -15073,6 +15938,13 @@
           </a:solidFill>
           <a:ln/>
         </p:spPr>
+        <p:txBody>
+          <a:bodyPr/>
+          <a:lstStyle/>
+          <a:p>
+            <a:endParaRPr lang="es-PE"/>
+          </a:p>
+        </p:txBody>
       </p:sp>
       <p:sp>
         <p:nvSpPr>
@@ -15095,7 +15967,7 @@
           <a:bodyPr wrap="square" rtlCol="0" anchor="ctr"/>
           <a:lstStyle/>
           <a:p>
-            <a:pPr indent="0" marL="0">
+            <a:pPr marL="0" indent="0">
               <a:buNone/>
             </a:pPr>
             <a:r>
@@ -15134,7 +16006,7 @@
           <a:bodyPr wrap="square" rtlCol="0" anchor="ctr"/>
           <a:lstStyle/>
           <a:p>
-            <a:pPr indent="0" marL="0">
+            <a:pPr marL="0" indent="0">
               <a:buNone/>
             </a:pPr>
             <a:r>
@@ -15173,7 +16045,7 @@
           <a:bodyPr wrap="square" rtlCol="0" anchor="ctr"/>
           <a:lstStyle/>
           <a:p>
-            <a:pPr algn="r" indent="0" marL="0">
+            <a:pPr marL="0" indent="0" algn="r">
               <a:buNone/>
             </a:pPr>
             <a:r>
@@ -15492,4 +16364,319 @@
     </a:ext>
   </a:extLst>
 </a:theme>
+</file>
+
+<file path=ppt/theme/theme2.xml><?xml version="1.0" encoding="utf-8"?>
+<a:theme xmlns:a="http://schemas.openxmlformats.org/drawingml/2006/main" name="Office Theme">
+  <a:themeElements>
+    <a:clrScheme name="Office">
+      <a:dk1>
+        <a:sysClr val="windowText" lastClr="000000"/>
+      </a:dk1>
+      <a:lt1>
+        <a:sysClr val="window" lastClr="FFFFFF"/>
+      </a:lt1>
+      <a:dk2>
+        <a:srgbClr val="0E2841"/>
+      </a:dk2>
+      <a:lt2>
+        <a:srgbClr val="E8E8E8"/>
+      </a:lt2>
+      <a:accent1>
+        <a:srgbClr val="156082"/>
+      </a:accent1>
+      <a:accent2>
+        <a:srgbClr val="E97132"/>
+      </a:accent2>
+      <a:accent3>
+        <a:srgbClr val="196B24"/>
+      </a:accent3>
+      <a:accent4>
+        <a:srgbClr val="0F9ED5"/>
+      </a:accent4>
+      <a:accent5>
+        <a:srgbClr val="A02B93"/>
+      </a:accent5>
+      <a:accent6>
+        <a:srgbClr val="4EA72E"/>
+      </a:accent6>
+      <a:hlink>
+        <a:srgbClr val="467886"/>
+      </a:hlink>
+      <a:folHlink>
+        <a:srgbClr val="96607D"/>
+      </a:folHlink>
+    </a:clrScheme>
+    <a:fontScheme name="Office">
+      <a:majorFont>
+        <a:latin typeface="Aptos Display" panose="02110004020202020204"/>
+        <a:ea typeface=""/>
+        <a:cs typeface=""/>
+        <a:font script="Jpan" typeface="游ゴシック Light"/>
+        <a:font script="Hang" typeface="맑은 고딕"/>
+        <a:font script="Hans" typeface="等线 Light"/>
+        <a:font script="Hant" typeface="新細明體"/>
+        <a:font script="Arab" typeface="Times New Roman"/>
+        <a:font script="Hebr" typeface="Times New Roman"/>
+        <a:font script="Thai" typeface="Angsana New"/>
+        <a:font script="Ethi" typeface="Nyala"/>
+        <a:font script="Beng" typeface="Vrinda"/>
+        <a:font script="Gujr" typeface="Shruti"/>
+        <a:font script="Khmr" typeface="MoolBoran"/>
+        <a:font script="Knda" typeface="Tunga"/>
+        <a:font script="Guru" typeface="Raavi"/>
+        <a:font script="Cans" typeface="Euphemia"/>
+        <a:font script="Cher" typeface="Plantagenet Cherokee"/>
+        <a:font script="Yiii" typeface="Microsoft Yi Baiti"/>
+        <a:font script="Tibt" typeface="Microsoft Himalaya"/>
+        <a:font script="Thaa" typeface="MV Boli"/>
+        <a:font script="Deva" typeface="Mangal"/>
+        <a:font script="Telu" typeface="Gautami"/>
+        <a:font script="Taml" typeface="Latha"/>
+        <a:font script="Syrc" typeface="Estrangelo Edessa"/>
+        <a:font script="Orya" typeface="Kalinga"/>
+        <a:font script="Mlym" typeface="Kartika"/>
+        <a:font script="Laoo" typeface="DokChampa"/>
+        <a:font script="Sinh" typeface="Iskoola Pota"/>
+        <a:font script="Mong" typeface="Mongolian Baiti"/>
+        <a:font script="Viet" typeface="Times New Roman"/>
+        <a:font script="Uigh" typeface="Microsoft Uighur"/>
+        <a:font script="Geor" typeface="Sylfaen"/>
+        <a:font script="Armn" typeface="Arial"/>
+        <a:font script="Bugi" typeface="Leelawadee UI"/>
+        <a:font script="Bopo" typeface="Microsoft JhengHei"/>
+        <a:font script="Java" typeface="Javanese Text"/>
+        <a:font script="Lisu" typeface="Segoe UI"/>
+        <a:font script="Mymr" typeface="Myanmar Text"/>
+        <a:font script="Nkoo" typeface="Ebrima"/>
+        <a:font script="Olck" typeface="Nirmala UI"/>
+        <a:font script="Osma" typeface="Ebrima"/>
+        <a:font script="Phag" typeface="Phagspa"/>
+        <a:font script="Syrn" typeface="Estrangelo Edessa"/>
+        <a:font script="Syrj" typeface="Estrangelo Edessa"/>
+        <a:font script="Syre" typeface="Estrangelo Edessa"/>
+        <a:font script="Sora" typeface="Nirmala UI"/>
+        <a:font script="Tale" typeface="Microsoft Tai Le"/>
+        <a:font script="Talu" typeface="Microsoft New Tai Lue"/>
+        <a:font script="Tfng" typeface="Ebrima"/>
+      </a:majorFont>
+      <a:minorFont>
+        <a:latin typeface="Aptos" panose="02110004020202020204"/>
+        <a:ea typeface=""/>
+        <a:cs typeface=""/>
+        <a:font script="Jpan" typeface="游ゴシック"/>
+        <a:font script="Hang" typeface="맑은 고딕"/>
+        <a:font script="Hans" typeface="等线"/>
+        <a:font script="Hant" typeface="新細明體"/>
+        <a:font script="Arab" typeface="Arial"/>
+        <a:font script="Hebr" typeface="Arial"/>
+        <a:font script="Thai" typeface="Cordia New"/>
+        <a:font script="Ethi" typeface="Nyala"/>
+        <a:font script="Beng" typeface="Vrinda"/>
+        <a:font script="Gujr" typeface="Shruti"/>
+        <a:font script="Khmr" typeface="DaunPenh"/>
+        <a:font script="Knda" typeface="Tunga"/>
+        <a:font script="Guru" typeface="Raavi"/>
+        <a:font script="Cans" typeface="Euphemia"/>
+        <a:font script="Cher" typeface="Plantagenet Cherokee"/>
+        <a:font script="Yiii" typeface="Microsoft Yi Baiti"/>
+        <a:font script="Tibt" typeface="Microsoft Himalaya"/>
+        <a:font script="Thaa" typeface="MV Boli"/>
+        <a:font script="Deva" typeface="Mangal"/>
+        <a:font script="Telu" typeface="Gautami"/>
+        <a:font script="Taml" typeface="Latha"/>
+        <a:font script="Syrc" typeface="Estrangelo Edessa"/>
+        <a:font script="Orya" typeface="Kalinga"/>
+        <a:font script="Mlym" typeface="Kartika"/>
+        <a:font script="Laoo" typeface="DokChampa"/>
+        <a:font script="Sinh" typeface="Iskoola Pota"/>
+        <a:font script="Mong" typeface="Mongolian Baiti"/>
+        <a:font script="Viet" typeface="Arial"/>
+        <a:font script="Uigh" typeface="Microsoft Uighur"/>
+        <a:font script="Geor" typeface="Sylfaen"/>
+        <a:font script="Armn" typeface="Arial"/>
+        <a:font script="Bugi" typeface="Leelawadee UI"/>
+        <a:font script="Bopo" typeface="Microsoft JhengHei"/>
+        <a:font script="Java" typeface="Javanese Text"/>
+        <a:font script="Lisu" typeface="Segoe UI"/>
+        <a:font script="Mymr" typeface="Myanmar Text"/>
+        <a:font script="Nkoo" typeface="Ebrima"/>
+        <a:font script="Olck" typeface="Nirmala UI"/>
+        <a:font script="Osma" typeface="Ebrima"/>
+        <a:font script="Phag" typeface="Phagspa"/>
+        <a:font script="Syrn" typeface="Estrangelo Edessa"/>
+        <a:font script="Syrj" typeface="Estrangelo Edessa"/>
+        <a:font script="Syre" typeface="Estrangelo Edessa"/>
+        <a:font script="Sora" typeface="Nirmala UI"/>
+        <a:font script="Tale" typeface="Microsoft Tai Le"/>
+        <a:font script="Talu" typeface="Microsoft New Tai Lue"/>
+        <a:font script="Tfng" typeface="Ebrima"/>
+      </a:minorFont>
+    </a:fontScheme>
+    <a:fmtScheme name="Office">
+      <a:fillStyleLst>
+        <a:solidFill>
+          <a:schemeClr val="phClr"/>
+        </a:solidFill>
+        <a:gradFill rotWithShape="1">
+          <a:gsLst>
+            <a:gs pos="0">
+              <a:schemeClr val="phClr">
+                <a:lumMod val="110000"/>
+                <a:satMod val="105000"/>
+                <a:tint val="67000"/>
+              </a:schemeClr>
+            </a:gs>
+            <a:gs pos="50000">
+              <a:schemeClr val="phClr">
+                <a:lumMod val="105000"/>
+                <a:satMod val="103000"/>
+                <a:tint val="73000"/>
+              </a:schemeClr>
+            </a:gs>
+            <a:gs pos="100000">
+              <a:schemeClr val="phClr">
+                <a:lumMod val="105000"/>
+                <a:satMod val="109000"/>
+                <a:tint val="81000"/>
+              </a:schemeClr>
+            </a:gs>
+          </a:gsLst>
+          <a:lin ang="5400000" scaled="0"/>
+        </a:gradFill>
+        <a:gradFill rotWithShape="1">
+          <a:gsLst>
+            <a:gs pos="0">
+              <a:schemeClr val="phClr">
+                <a:satMod val="103000"/>
+                <a:lumMod val="102000"/>
+                <a:tint val="94000"/>
+              </a:schemeClr>
+            </a:gs>
+            <a:gs pos="50000">
+              <a:schemeClr val="phClr">
+                <a:satMod val="110000"/>
+                <a:lumMod val="100000"/>
+                <a:shade val="100000"/>
+              </a:schemeClr>
+            </a:gs>
+            <a:gs pos="100000">
+              <a:schemeClr val="phClr">
+                <a:lumMod val="99000"/>
+                <a:satMod val="120000"/>
+                <a:shade val="78000"/>
+              </a:schemeClr>
+            </a:gs>
+          </a:gsLst>
+          <a:lin ang="5400000" scaled="0"/>
+        </a:gradFill>
+      </a:fillStyleLst>
+      <a:lnStyleLst>
+        <a:ln w="12700" cap="flat" cmpd="sng" algn="ctr">
+          <a:solidFill>
+            <a:schemeClr val="phClr"/>
+          </a:solidFill>
+          <a:prstDash val="solid"/>
+          <a:miter lim="800000"/>
+        </a:ln>
+        <a:ln w="19050" cap="flat" cmpd="sng" algn="ctr">
+          <a:solidFill>
+            <a:schemeClr val="phClr"/>
+          </a:solidFill>
+          <a:prstDash val="solid"/>
+          <a:miter lim="800000"/>
+        </a:ln>
+        <a:ln w="25400" cap="flat" cmpd="sng" algn="ctr">
+          <a:solidFill>
+            <a:schemeClr val="phClr"/>
+          </a:solidFill>
+          <a:prstDash val="solid"/>
+          <a:miter lim="800000"/>
+        </a:ln>
+      </a:lnStyleLst>
+      <a:effectStyleLst>
+        <a:effectStyle>
+          <a:effectLst/>
+        </a:effectStyle>
+        <a:effectStyle>
+          <a:effectLst/>
+        </a:effectStyle>
+        <a:effectStyle>
+          <a:effectLst>
+            <a:outerShdw blurRad="57150" dist="19050" dir="5400000" algn="ctr" rotWithShape="0">
+              <a:srgbClr val="000000">
+                <a:alpha val="63000"/>
+              </a:srgbClr>
+            </a:outerShdw>
+          </a:effectLst>
+        </a:effectStyle>
+      </a:effectStyleLst>
+      <a:bgFillStyleLst>
+        <a:solidFill>
+          <a:schemeClr val="phClr"/>
+        </a:solidFill>
+        <a:solidFill>
+          <a:schemeClr val="phClr">
+            <a:tint val="95000"/>
+            <a:satMod val="170000"/>
+          </a:schemeClr>
+        </a:solidFill>
+        <a:gradFill rotWithShape="1">
+          <a:gsLst>
+            <a:gs pos="0">
+              <a:schemeClr val="phClr">
+                <a:tint val="93000"/>
+                <a:satMod val="150000"/>
+                <a:shade val="98000"/>
+                <a:lumMod val="102000"/>
+              </a:schemeClr>
+            </a:gs>
+            <a:gs pos="50000">
+              <a:schemeClr val="phClr">
+                <a:tint val="98000"/>
+                <a:satMod val="130000"/>
+                <a:shade val="90000"/>
+                <a:lumMod val="103000"/>
+              </a:schemeClr>
+            </a:gs>
+            <a:gs pos="100000">
+              <a:schemeClr val="phClr">
+                <a:shade val="63000"/>
+                <a:satMod val="120000"/>
+              </a:schemeClr>
+            </a:gs>
+          </a:gsLst>
+          <a:lin ang="5400000" scaled="0"/>
+        </a:gradFill>
+      </a:bgFillStyleLst>
+    </a:fmtScheme>
+  </a:themeElements>
+  <a:objectDefaults>
+    <a:lnDef>
+      <a:spPr/>
+      <a:bodyPr/>
+      <a:lstStyle/>
+      <a:style>
+        <a:lnRef idx="2">
+          <a:schemeClr val="accent1"/>
+        </a:lnRef>
+        <a:fillRef idx="0">
+          <a:schemeClr val="accent1"/>
+        </a:fillRef>
+        <a:effectRef idx="1">
+          <a:schemeClr val="accent1"/>
+        </a:effectRef>
+        <a:fontRef idx="minor">
+          <a:schemeClr val="tx1"/>
+        </a:fontRef>
+      </a:style>
+    </a:lnDef>
+  </a:objectDefaults>
+  <a:extraClrSchemeLst/>
+  <a:extLst>
+    <a:ext uri="{05A4C25C-085E-4340-85A3-A5531E510DB2}">
+      <thm15:themeFamily xmlns:thm15="http://schemas.microsoft.com/office/thememl/2012/main" name="Office Theme" id="{2E142A2C-CD16-42D6-873A-C26D2A0506FA}" vid="{1BDDFF52-6CD6-40A5-AB3C-68EB2F1E4D0A}"/>
+    </a:ext>
+  </a:extLst>
+</a:theme>
 </file>